--- a/public/lessons/year-6-maths/autumn/week-9/reason-about-arithmetic-relationships/teaching-powerpoint-v1.pptx
+++ b/public/lessons/year-6-maths/autumn/week-9/reason-about-arithmetic-relationships/teaching-powerpoint-v1.pptx
@@ -2,24 +2,24 @@
 <file path=ppt/presentation.xml><?xml version="1.0" encoding="utf-8"?>
 <p:presentation xmlns:p="http://schemas.openxmlformats.org/presentationml/2006/main">
   <p:sldMasterIdLst>
-    <p:sldMasterId xmlns:r="http://schemas.openxmlformats.org/officeDocument/2006/relationships" id="2147483648" r:id="R55ce4a5855a443b0"/>
+    <p:sldMasterId xmlns:r="http://schemas.openxmlformats.org/officeDocument/2006/relationships" id="2147483648" r:id="Rb45107568b87415d"/>
   </p:sldMasterIdLst>
   <p:notesMasterIdLst>
-    <p:notesMasterId xmlns:r="http://schemas.openxmlformats.org/officeDocument/2006/relationships" r:id="Re8bd4f2057f54f08"/>
+    <p:notesMasterId xmlns:r="http://schemas.openxmlformats.org/officeDocument/2006/relationships" r:id="R26d7ca557d194f98"/>
   </p:notesMasterIdLst>
   <p:sldIdLst>
-    <p:sldId xmlns:r="http://schemas.openxmlformats.org/officeDocument/2006/relationships" id="256" r:id="Rbe552c5b55e64075"/>
-    <p:sldId xmlns:r="http://schemas.openxmlformats.org/officeDocument/2006/relationships" id="257" r:id="R75cf477733c24829"/>
-    <p:sldId xmlns:r="http://schemas.openxmlformats.org/officeDocument/2006/relationships" id="258" r:id="Rb91081c3af8b4c6f"/>
-    <p:sldId xmlns:r="http://schemas.openxmlformats.org/officeDocument/2006/relationships" id="259" r:id="Rcbd72669cce64570"/>
-    <p:sldId xmlns:r="http://schemas.openxmlformats.org/officeDocument/2006/relationships" id="260" r:id="R8cc9ed129d2042d2"/>
-    <p:sldId xmlns:r="http://schemas.openxmlformats.org/officeDocument/2006/relationships" id="261" r:id="R02b60b83ddd44074"/>
-    <p:sldId xmlns:r="http://schemas.openxmlformats.org/officeDocument/2006/relationships" id="262" r:id="R8f3dcd25da254768"/>
-    <p:sldId xmlns:r="http://schemas.openxmlformats.org/officeDocument/2006/relationships" id="263" r:id="Rb98b7860a8fa49ef"/>
-    <p:sldId xmlns:r="http://schemas.openxmlformats.org/officeDocument/2006/relationships" id="264" r:id="R75529d137ba44b77"/>
-    <p:sldId xmlns:r="http://schemas.openxmlformats.org/officeDocument/2006/relationships" id="265" r:id="Rd519da11e7bc4893"/>
-    <p:sldId xmlns:r="http://schemas.openxmlformats.org/officeDocument/2006/relationships" id="266" r:id="R2d3c268f10c74a58"/>
-    <p:sldId xmlns:r="http://schemas.openxmlformats.org/officeDocument/2006/relationships" id="267" r:id="Rf6c98505d6f447ae"/>
+    <p:sldId xmlns:r="http://schemas.openxmlformats.org/officeDocument/2006/relationships" id="256" r:id="R5cc40521b4614911"/>
+    <p:sldId xmlns:r="http://schemas.openxmlformats.org/officeDocument/2006/relationships" id="257" r:id="Ra6f019b00d634561"/>
+    <p:sldId xmlns:r="http://schemas.openxmlformats.org/officeDocument/2006/relationships" id="258" r:id="Re040e855c3d54a63"/>
+    <p:sldId xmlns:r="http://schemas.openxmlformats.org/officeDocument/2006/relationships" id="259" r:id="R7db3c387780d42ac"/>
+    <p:sldId xmlns:r="http://schemas.openxmlformats.org/officeDocument/2006/relationships" id="260" r:id="R0da0f99df1d546c7"/>
+    <p:sldId xmlns:r="http://schemas.openxmlformats.org/officeDocument/2006/relationships" id="261" r:id="Re93f1db56ea8405c"/>
+    <p:sldId xmlns:r="http://schemas.openxmlformats.org/officeDocument/2006/relationships" id="262" r:id="R6bf97b8145ed42f7"/>
+    <p:sldId xmlns:r="http://schemas.openxmlformats.org/officeDocument/2006/relationships" id="263" r:id="Rd2e065ae7ee04c88"/>
+    <p:sldId xmlns:r="http://schemas.openxmlformats.org/officeDocument/2006/relationships" id="264" r:id="R3a3fe4a0b2a2435b"/>
+    <p:sldId xmlns:r="http://schemas.openxmlformats.org/officeDocument/2006/relationships" id="265" r:id="R6952b6be9b264976"/>
+    <p:sldId xmlns:r="http://schemas.openxmlformats.org/officeDocument/2006/relationships" id="266" r:id="R2bd91e4ea76144a4"/>
+    <p:sldId xmlns:r="http://schemas.openxmlformats.org/officeDocument/2006/relationships" id="267" r:id="R478580cfeb0b4a8e"/>
   </p:sldIdLst>
   <p:sldSz cx="12192000" cy="6858000"/>
   <p:notesSz cx="6858000" cy="9144000"/>
@@ -873,7 +873,7 @@
           <a:lstStyle xmlns:a="http://schemas.openxmlformats.org/drawingml/2006/main"/>
           <a:p xmlns:a="http://schemas.openxmlformats.org/drawingml/2006/main">
             <a:r>
-              <a:t>I do. Reveal the question, setup and each calculation stage one click at a time. Pupils watch before copying. Model answer: 13.5.</a:t>
+              <a:t>I do. Reveal the question, then reveal each mathematical change one click at a time. Point to the numbers and operation that changed before moving to the next line. Final answer: 13.5.</a:t>
             </a:r>
           </a:p>
         </p:txBody>
@@ -1291,7 +1291,7 @@
   </p:cSld>
   <p:clrMap bg1="lt1" tx1="dk1" bg2="lt2" tx2="dk2" accent1="accent1" accent2="accent2" accent3="accent3" accent4="accent4" accent5="accent5" accent6="accent6" hlink="hlink" folHlink="folHlink"/>
   <p:sldLayoutIdLst>
-    <p:sldLayoutId xmlns:r="http://schemas.openxmlformats.org/officeDocument/2006/relationships" id="2147483649" r:id="R6074a75b06f74687"/>
+    <p:sldLayoutId xmlns:r="http://schemas.openxmlformats.org/officeDocument/2006/relationships" id="2147483649" r:id="Rd3704bc24aa64b24"/>
   </p:sldLayoutIdLst>
   <p:txStyles>
     <p:titleStyle>
@@ -1842,7 +1842,7 @@
           <p:cNvPr id="12" name="">
             <a:extLst xmlns:a="http://schemas.openxmlformats.org/drawingml/2006/main">
               <a:ext uri="{FF2B5EF4-FFF2-40B4-BE49-F238E27FC236}">
-                <a16:creationId xmlns:a16="http://schemas.microsoft.com/office/drawing/2014/main" id="{BCBDBEBF-72ED-4F5B-B20E-D7E4FC896AD0}"/>
+                <a16:creationId xmlns:a16="http://schemas.microsoft.com/office/drawing/2014/main" id="{3A8DEC1D-F789-4DBB-89E0-B056A188578A}"/>
               </a:ext>
             </a:extLst>
           </p:cNvPr>
@@ -1874,7 +1874,7 @@
           <p:cNvPr id="2" name="">
             <a:extLst xmlns:a="http://schemas.openxmlformats.org/drawingml/2006/main">
               <a:ext uri="{FF2B5EF4-FFF2-40B4-BE49-F238E27FC236}">
-                <a16:creationId xmlns:a16="http://schemas.microsoft.com/office/drawing/2014/main" id="{94949D9E-949C-4C07-9F2A-4C8A63EEFA21}"/>
+                <a16:creationId xmlns:a16="http://schemas.microsoft.com/office/drawing/2014/main" id="{494BF3B3-112E-494D-A086-BB4F7D42F10F}"/>
               </a:ext>
             </a:extLst>
           </p:cNvPr>
@@ -1931,7 +1931,7 @@
           <p:cNvPr id="3" name="">
             <a:extLst xmlns:a="http://schemas.openxmlformats.org/drawingml/2006/main">
               <a:ext uri="{FF2B5EF4-FFF2-40B4-BE49-F238E27FC236}">
-                <a16:creationId xmlns:a16="http://schemas.microsoft.com/office/drawing/2014/main" id="{F1265F9C-0F46-46DC-8574-B8134F752F2A}"/>
+                <a16:creationId xmlns:a16="http://schemas.microsoft.com/office/drawing/2014/main" id="{3D36B7AD-2DFB-4A53-A462-9D511AA39A1E}"/>
               </a:ext>
             </a:extLst>
           </p:cNvPr>
@@ -1965,7 +1965,7 @@
           <p:cNvPr id="4" name="">
             <a:extLst xmlns:a="http://schemas.openxmlformats.org/drawingml/2006/main">
               <a:ext uri="{FF2B5EF4-FFF2-40B4-BE49-F238E27FC236}">
-                <a16:creationId xmlns:a16="http://schemas.microsoft.com/office/drawing/2014/main" id="{6FC74727-42B3-4BD9-AE03-8FD8CA24BF1F}"/>
+                <a16:creationId xmlns:a16="http://schemas.microsoft.com/office/drawing/2014/main" id="{62584CEA-EC94-4BD3-8CB8-DC627944522D}"/>
               </a:ext>
             </a:extLst>
           </p:cNvPr>
@@ -2022,7 +2022,7 @@
           <p:cNvPr id="5" name="">
             <a:extLst xmlns:a="http://schemas.openxmlformats.org/drawingml/2006/main">
               <a:ext uri="{FF2B5EF4-FFF2-40B4-BE49-F238E27FC236}">
-                <a16:creationId xmlns:a16="http://schemas.microsoft.com/office/drawing/2014/main" id="{77C5512C-42F6-4D3D-AA71-D1B108D4A62B}"/>
+                <a16:creationId xmlns:a16="http://schemas.microsoft.com/office/drawing/2014/main" id="{36E3E007-0AA8-4CA2-9326-0887FF5F70AE}"/>
               </a:ext>
             </a:extLst>
           </p:cNvPr>
@@ -2079,7 +2079,7 @@
           <p:cNvPr id="6" name="">
             <a:extLst xmlns:a="http://schemas.openxmlformats.org/drawingml/2006/main">
               <a:ext uri="{FF2B5EF4-FFF2-40B4-BE49-F238E27FC236}">
-                <a16:creationId xmlns:a16="http://schemas.microsoft.com/office/drawing/2014/main" id="{77EE90F1-2D87-43CA-8876-637F29B9953D}"/>
+                <a16:creationId xmlns:a16="http://schemas.microsoft.com/office/drawing/2014/main" id="{E83B5498-8658-410C-9CBB-99EA51DFE567}"/>
               </a:ext>
             </a:extLst>
           </p:cNvPr>
@@ -2113,7 +2113,7 @@
           <p:cNvPr id="7" name="">
             <a:extLst xmlns:a="http://schemas.openxmlformats.org/drawingml/2006/main">
               <a:ext uri="{FF2B5EF4-FFF2-40B4-BE49-F238E27FC236}">
-                <a16:creationId xmlns:a16="http://schemas.microsoft.com/office/drawing/2014/main" id="{A48B3527-1A76-40C9-A77E-59493F2DEC0E}"/>
+                <a16:creationId xmlns:a16="http://schemas.microsoft.com/office/drawing/2014/main" id="{003862BC-5C28-49EE-8669-B60B8086FC13}"/>
               </a:ext>
             </a:extLst>
           </p:cNvPr>
@@ -2170,7 +2170,7 @@
           <p:cNvPr id="8" name="">
             <a:extLst xmlns:a="http://schemas.openxmlformats.org/drawingml/2006/main">
               <a:ext uri="{FF2B5EF4-FFF2-40B4-BE49-F238E27FC236}">
-                <a16:creationId xmlns:a16="http://schemas.microsoft.com/office/drawing/2014/main" id="{3B8FBD0D-04AA-4FFA-A3D4-973FACA2FC72}"/>
+                <a16:creationId xmlns:a16="http://schemas.microsoft.com/office/drawing/2014/main" id="{1D554CC9-7982-4E2A-B74B-E94BD7B72D70}"/>
               </a:ext>
             </a:extLst>
           </p:cNvPr>
@@ -2227,7 +2227,7 @@
           <p:cNvPr id="9" name="">
             <a:extLst xmlns:a="http://schemas.openxmlformats.org/drawingml/2006/main">
               <a:ext uri="{FF2B5EF4-FFF2-40B4-BE49-F238E27FC236}">
-                <a16:creationId xmlns:a16="http://schemas.microsoft.com/office/drawing/2014/main" id="{346CCBD6-ABCF-4679-8BB4-6C5A518EE118}"/>
+                <a16:creationId xmlns:a16="http://schemas.microsoft.com/office/drawing/2014/main" id="{E5ACB1B0-2B7E-40E2-A95D-F3CD515B6D6C}"/>
               </a:ext>
             </a:extLst>
           </p:cNvPr>
@@ -2284,7 +2284,7 @@
           <p:cNvPr id="10" name="">
             <a:extLst xmlns:a="http://schemas.openxmlformats.org/drawingml/2006/main">
               <a:ext uri="{FF2B5EF4-FFF2-40B4-BE49-F238E27FC236}">
-                <a16:creationId xmlns:a16="http://schemas.microsoft.com/office/drawing/2014/main" id="{9D23D9AE-354A-4EAF-B298-1987405C5CD9}"/>
+                <a16:creationId xmlns:a16="http://schemas.microsoft.com/office/drawing/2014/main" id="{80F69198-117B-467F-9DBE-0AA78C9CFC44}"/>
               </a:ext>
             </a:extLst>
           </p:cNvPr>
@@ -2341,7 +2341,7 @@
           <p:cNvPr id="11" name="">
             <a:extLst xmlns:a="http://schemas.openxmlformats.org/drawingml/2006/main">
               <a:ext uri="{FF2B5EF4-FFF2-40B4-BE49-F238E27FC236}">
-                <a16:creationId xmlns:a16="http://schemas.microsoft.com/office/drawing/2014/main" id="{EECE1358-3A3B-45EE-85C5-769574A72349}"/>
+                <a16:creationId xmlns:a16="http://schemas.microsoft.com/office/drawing/2014/main" id="{307F3D3B-EAF9-4CE3-BD0C-90B0A9848F76}"/>
               </a:ext>
             </a:extLst>
           </p:cNvPr>
@@ -2396,7 +2396,7 @@
     </p:spTree>
     <p:extLst>
       <p:ext uri="{BB962C8B-B14F-4D97-AF65-F5344CB8AC3E}">
-        <p14:creationId xmlns:p14="http://schemas.microsoft.com/office/powerpoint/2010/main" val="1320487741"/>
+        <p14:creationId xmlns:p14="http://schemas.microsoft.com/office/powerpoint/2010/main" val="1516133710"/>
       </p:ext>
     </p:extLst>
   </p:cSld>
@@ -2427,7 +2427,7 @@
           <p:cNvPr id="14" name="">
             <a:extLst xmlns:a="http://schemas.openxmlformats.org/drawingml/2006/main">
               <a:ext uri="{FF2B5EF4-FFF2-40B4-BE49-F238E27FC236}">
-                <a16:creationId xmlns:a16="http://schemas.microsoft.com/office/drawing/2014/main" id="{E7FA2F46-0797-45EC-9749-0B25F722DAB7}"/>
+                <a16:creationId xmlns:a16="http://schemas.microsoft.com/office/drawing/2014/main" id="{021D7F72-E414-4AE7-B463-4E7B25AC7D22}"/>
               </a:ext>
             </a:extLst>
           </p:cNvPr>
@@ -2459,7 +2459,7 @@
           <p:cNvPr id="2" name="">
             <a:extLst xmlns:a="http://schemas.openxmlformats.org/drawingml/2006/main">
               <a:ext uri="{FF2B5EF4-FFF2-40B4-BE49-F238E27FC236}">
-                <a16:creationId xmlns:a16="http://schemas.microsoft.com/office/drawing/2014/main" id="{74A4D5AA-76FF-47DA-A5B1-C39787AAB0F5}"/>
+                <a16:creationId xmlns:a16="http://schemas.microsoft.com/office/drawing/2014/main" id="{3E8C962D-FA9C-45FC-AE8C-75E374D8A449}"/>
               </a:ext>
             </a:extLst>
           </p:cNvPr>
@@ -2516,7 +2516,7 @@
           <p:cNvPr id="3" name="">
             <a:extLst xmlns:a="http://schemas.openxmlformats.org/drawingml/2006/main">
               <a:ext uri="{FF2B5EF4-FFF2-40B4-BE49-F238E27FC236}">
-                <a16:creationId xmlns:a16="http://schemas.microsoft.com/office/drawing/2014/main" id="{5308D3E4-EE62-4F4F-8ADF-335B631E46EA}"/>
+                <a16:creationId xmlns:a16="http://schemas.microsoft.com/office/drawing/2014/main" id="{C90DC920-AA4A-4D29-9867-6250D5C3CEFE}"/>
               </a:ext>
             </a:extLst>
           </p:cNvPr>
@@ -2548,7 +2548,7 @@
           <p:cNvPr id="4" name="">
             <a:extLst xmlns:a="http://schemas.openxmlformats.org/drawingml/2006/main">
               <a:ext uri="{FF2B5EF4-FFF2-40B4-BE49-F238E27FC236}">
-                <a16:creationId xmlns:a16="http://schemas.microsoft.com/office/drawing/2014/main" id="{BF1B852B-98CC-4E17-B6C4-E9749191AE15}"/>
+                <a16:creationId xmlns:a16="http://schemas.microsoft.com/office/drawing/2014/main" id="{79929B03-1FFF-4B1E-AC5D-C2568949C905}"/>
               </a:ext>
             </a:extLst>
           </p:cNvPr>
@@ -2605,7 +2605,7 @@
           <p:cNvPr id="5" name="">
             <a:extLst xmlns:a="http://schemas.openxmlformats.org/drawingml/2006/main">
               <a:ext uri="{FF2B5EF4-FFF2-40B4-BE49-F238E27FC236}">
-                <a16:creationId xmlns:a16="http://schemas.microsoft.com/office/drawing/2014/main" id="{C614B647-D9DE-4C43-BE5E-B60356D48B3F}"/>
+                <a16:creationId xmlns:a16="http://schemas.microsoft.com/office/drawing/2014/main" id="{5B5A4DBD-F8E8-4A8C-9ADC-775708001AC8}"/>
               </a:ext>
             </a:extLst>
           </p:cNvPr>
@@ -2662,7 +2662,7 @@
           <p:cNvPr id="6" name="">
             <a:extLst xmlns:a="http://schemas.openxmlformats.org/drawingml/2006/main">
               <a:ext uri="{FF2B5EF4-FFF2-40B4-BE49-F238E27FC236}">
-                <a16:creationId xmlns:a16="http://schemas.microsoft.com/office/drawing/2014/main" id="{B9CD3E92-359E-4DDB-858A-65EC0912F03C}"/>
+                <a16:creationId xmlns:a16="http://schemas.microsoft.com/office/drawing/2014/main" id="{E002F500-97EC-46A2-B7B4-DF3FC0A31310}"/>
               </a:ext>
             </a:extLst>
           </p:cNvPr>
@@ -2719,7 +2719,7 @@
           <p:cNvPr id="7" name="">
             <a:extLst xmlns:a="http://schemas.openxmlformats.org/drawingml/2006/main">
               <a:ext uri="{FF2B5EF4-FFF2-40B4-BE49-F238E27FC236}">
-                <a16:creationId xmlns:a16="http://schemas.microsoft.com/office/drawing/2014/main" id="{1053351A-8FA2-4100-8035-F052DC325D57}"/>
+                <a16:creationId xmlns:a16="http://schemas.microsoft.com/office/drawing/2014/main" id="{580C6056-0111-44E2-AB51-10C68DCCA53C}"/>
               </a:ext>
             </a:extLst>
           </p:cNvPr>
@@ -2751,7 +2751,7 @@
           <p:cNvPr id="8" name="">
             <a:extLst xmlns:a="http://schemas.openxmlformats.org/drawingml/2006/main">
               <a:ext uri="{FF2B5EF4-FFF2-40B4-BE49-F238E27FC236}">
-                <a16:creationId xmlns:a16="http://schemas.microsoft.com/office/drawing/2014/main" id="{7C89E32E-D91B-4850-9941-9F3570AB6898}"/>
+                <a16:creationId xmlns:a16="http://schemas.microsoft.com/office/drawing/2014/main" id="{C200220C-1E70-45B7-A155-982600FE2565}"/>
               </a:ext>
             </a:extLst>
           </p:cNvPr>
@@ -2808,7 +2808,7 @@
           <p:cNvPr id="9" name="">
             <a:extLst xmlns:a="http://schemas.openxmlformats.org/drawingml/2006/main">
               <a:ext uri="{FF2B5EF4-FFF2-40B4-BE49-F238E27FC236}">
-                <a16:creationId xmlns:a16="http://schemas.microsoft.com/office/drawing/2014/main" id="{B5B3DCBD-7796-4BBA-A48B-C876ADA76A36}"/>
+                <a16:creationId xmlns:a16="http://schemas.microsoft.com/office/drawing/2014/main" id="{1F59E54D-2A74-4BC8-842F-21123217B0F2}"/>
               </a:ext>
             </a:extLst>
           </p:cNvPr>
@@ -2865,7 +2865,7 @@
           <p:cNvPr id="10" name="">
             <a:extLst xmlns:a="http://schemas.openxmlformats.org/drawingml/2006/main">
               <a:ext uri="{FF2B5EF4-FFF2-40B4-BE49-F238E27FC236}">
-                <a16:creationId xmlns:a16="http://schemas.microsoft.com/office/drawing/2014/main" id="{0FCBAE70-B915-4FEB-BE46-AB48D227172A}"/>
+                <a16:creationId xmlns:a16="http://schemas.microsoft.com/office/drawing/2014/main" id="{EA8AF048-66B3-43D2-BD24-CDFB585BCC32}"/>
               </a:ext>
             </a:extLst>
           </p:cNvPr>
@@ -2922,7 +2922,7 @@
           <p:cNvPr id="11" name="">
             <a:extLst xmlns:a="http://schemas.openxmlformats.org/drawingml/2006/main">
               <a:ext uri="{FF2B5EF4-FFF2-40B4-BE49-F238E27FC236}">
-                <a16:creationId xmlns:a16="http://schemas.microsoft.com/office/drawing/2014/main" id="{A2D5D0ED-C2DA-4673-9448-B1AC625F169C}"/>
+                <a16:creationId xmlns:a16="http://schemas.microsoft.com/office/drawing/2014/main" id="{75C17954-A2D1-4629-B6B8-0B88FCC46092}"/>
               </a:ext>
             </a:extLst>
           </p:cNvPr>
@@ -2979,7 +2979,7 @@
           <p:cNvPr id="12" name="">
             <a:extLst xmlns:a="http://schemas.openxmlformats.org/drawingml/2006/main">
               <a:ext uri="{FF2B5EF4-FFF2-40B4-BE49-F238E27FC236}">
-                <a16:creationId xmlns:a16="http://schemas.microsoft.com/office/drawing/2014/main" id="{714E5175-C50F-4DA2-993D-01AAEADD674E}"/>
+                <a16:creationId xmlns:a16="http://schemas.microsoft.com/office/drawing/2014/main" id="{52448F54-B5F3-48CF-BACB-C66141E01313}"/>
               </a:ext>
             </a:extLst>
           </p:cNvPr>
@@ -3036,7 +3036,7 @@
           <p:cNvPr id="13" name="">
             <a:extLst xmlns:a="http://schemas.openxmlformats.org/drawingml/2006/main">
               <a:ext uri="{FF2B5EF4-FFF2-40B4-BE49-F238E27FC236}">
-                <a16:creationId xmlns:a16="http://schemas.microsoft.com/office/drawing/2014/main" id="{D770FA5D-5FCD-4B40-9AAC-67CC58008F45}"/>
+                <a16:creationId xmlns:a16="http://schemas.microsoft.com/office/drawing/2014/main" id="{AC4DC8F8-39B1-4765-A29C-B2C43A637769}"/>
               </a:ext>
             </a:extLst>
           </p:cNvPr>
@@ -3091,7 +3091,7 @@
     </p:spTree>
     <p:extLst>
       <p:ext uri="{BB962C8B-B14F-4D97-AF65-F5344CB8AC3E}">
-        <p14:creationId xmlns:p14="http://schemas.microsoft.com/office/powerpoint/2010/main" val="1722687042"/>
+        <p14:creationId xmlns:p14="http://schemas.microsoft.com/office/powerpoint/2010/main" val="154219231"/>
       </p:ext>
     </p:extLst>
   </p:cSld>
@@ -3292,7 +3292,7 @@
           <p:cNvPr id="19" name="">
             <a:extLst xmlns:a="http://schemas.openxmlformats.org/drawingml/2006/main">
               <a:ext uri="{FF2B5EF4-FFF2-40B4-BE49-F238E27FC236}">
-                <a16:creationId xmlns:a16="http://schemas.microsoft.com/office/drawing/2014/main" id="{04A478BE-841B-4282-A917-7E8741FCECC5}"/>
+                <a16:creationId xmlns:a16="http://schemas.microsoft.com/office/drawing/2014/main" id="{F5DEC207-61DD-4ADF-BF49-38F49D478D27}"/>
               </a:ext>
             </a:extLst>
           </p:cNvPr>
@@ -3324,7 +3324,7 @@
           <p:cNvPr id="2" name="">
             <a:extLst xmlns:a="http://schemas.openxmlformats.org/drawingml/2006/main">
               <a:ext uri="{FF2B5EF4-FFF2-40B4-BE49-F238E27FC236}">
-                <a16:creationId xmlns:a16="http://schemas.microsoft.com/office/drawing/2014/main" id="{A87CE347-9C2C-4179-B872-41F3844C5BE6}"/>
+                <a16:creationId xmlns:a16="http://schemas.microsoft.com/office/drawing/2014/main" id="{D57B45E7-3241-4B73-BD48-E816A991CF19}"/>
               </a:ext>
             </a:extLst>
           </p:cNvPr>
@@ -3381,7 +3381,7 @@
           <p:cNvPr id="3" name="">
             <a:extLst xmlns:a="http://schemas.openxmlformats.org/drawingml/2006/main">
               <a:ext uri="{FF2B5EF4-FFF2-40B4-BE49-F238E27FC236}">
-                <a16:creationId xmlns:a16="http://schemas.microsoft.com/office/drawing/2014/main" id="{665E479E-A689-4C3C-BE29-75438E55323E}"/>
+                <a16:creationId xmlns:a16="http://schemas.microsoft.com/office/drawing/2014/main" id="{28C6B399-9B4B-459A-ABEC-682B4AD774A9}"/>
               </a:ext>
             </a:extLst>
           </p:cNvPr>
@@ -3413,7 +3413,7 @@
           <p:cNvPr id="4" name="">
             <a:extLst xmlns:a="http://schemas.openxmlformats.org/drawingml/2006/main">
               <a:ext uri="{FF2B5EF4-FFF2-40B4-BE49-F238E27FC236}">
-                <a16:creationId xmlns:a16="http://schemas.microsoft.com/office/drawing/2014/main" id="{64CE1B04-4E53-48B4-9914-F650516D188D}"/>
+                <a16:creationId xmlns:a16="http://schemas.microsoft.com/office/drawing/2014/main" id="{BFE8AB56-E27D-4B75-B2EC-F6C802C6D3C8}"/>
               </a:ext>
             </a:extLst>
           </p:cNvPr>
@@ -3470,7 +3470,7 @@
           <p:cNvPr id="5" name="">
             <a:extLst xmlns:a="http://schemas.openxmlformats.org/drawingml/2006/main">
               <a:ext uri="{FF2B5EF4-FFF2-40B4-BE49-F238E27FC236}">
-                <a16:creationId xmlns:a16="http://schemas.microsoft.com/office/drawing/2014/main" id="{9483F036-C480-41FA-A5EB-060C16A78350}"/>
+                <a16:creationId xmlns:a16="http://schemas.microsoft.com/office/drawing/2014/main" id="{B3229EB0-FE21-4C55-9EF6-0C0B49C5D01D}"/>
               </a:ext>
             </a:extLst>
           </p:cNvPr>
@@ -3527,7 +3527,7 @@
           <p:cNvPr id="6" name="">
             <a:extLst xmlns:a="http://schemas.openxmlformats.org/drawingml/2006/main">
               <a:ext uri="{FF2B5EF4-FFF2-40B4-BE49-F238E27FC236}">
-                <a16:creationId xmlns:a16="http://schemas.microsoft.com/office/drawing/2014/main" id="{56E62DE8-AE03-4E5E-B507-CE9FE282C428}"/>
+                <a16:creationId xmlns:a16="http://schemas.microsoft.com/office/drawing/2014/main" id="{55CA3C44-9E84-461B-AD99-AD50493235D9}"/>
               </a:ext>
             </a:extLst>
           </p:cNvPr>
@@ -3584,7 +3584,7 @@
           <p:cNvPr id="7" name="">
             <a:extLst xmlns:a="http://schemas.openxmlformats.org/drawingml/2006/main">
               <a:ext uri="{FF2B5EF4-FFF2-40B4-BE49-F238E27FC236}">
-                <a16:creationId xmlns:a16="http://schemas.microsoft.com/office/drawing/2014/main" id="{D250D0F1-6044-4384-9EC9-2B461621D9BE}"/>
+                <a16:creationId xmlns:a16="http://schemas.microsoft.com/office/drawing/2014/main" id="{8337FC54-79D0-4A5C-A159-38BF5B299BF6}"/>
               </a:ext>
             </a:extLst>
           </p:cNvPr>
@@ -3616,7 +3616,7 @@
           <p:cNvPr id="8" name="">
             <a:extLst xmlns:a="http://schemas.openxmlformats.org/drawingml/2006/main">
               <a:ext uri="{FF2B5EF4-FFF2-40B4-BE49-F238E27FC236}">
-                <a16:creationId xmlns:a16="http://schemas.microsoft.com/office/drawing/2014/main" id="{C0251A8D-6EDC-46EE-97F7-A66AF12F1E73}"/>
+                <a16:creationId xmlns:a16="http://schemas.microsoft.com/office/drawing/2014/main" id="{A1FC1078-04D4-4FF9-B0A7-BC3FC87533D2}"/>
               </a:ext>
             </a:extLst>
           </p:cNvPr>
@@ -3673,7 +3673,7 @@
           <p:cNvPr id="9" name="">
             <a:extLst xmlns:a="http://schemas.openxmlformats.org/drawingml/2006/main">
               <a:ext uri="{FF2B5EF4-FFF2-40B4-BE49-F238E27FC236}">
-                <a16:creationId xmlns:a16="http://schemas.microsoft.com/office/drawing/2014/main" id="{012A73F4-3187-48E6-8332-73CEC50F5209}"/>
+                <a16:creationId xmlns:a16="http://schemas.microsoft.com/office/drawing/2014/main" id="{DCECB8A2-88AD-4B83-9FFE-5B1A7025F58E}"/>
               </a:ext>
             </a:extLst>
           </p:cNvPr>
@@ -3730,7 +3730,7 @@
           <p:cNvPr id="10" name="">
             <a:extLst xmlns:a="http://schemas.openxmlformats.org/drawingml/2006/main">
               <a:ext uri="{FF2B5EF4-FFF2-40B4-BE49-F238E27FC236}">
-                <a16:creationId xmlns:a16="http://schemas.microsoft.com/office/drawing/2014/main" id="{2B91F87F-3BD7-4146-9734-C926B1A2FA9F}"/>
+                <a16:creationId xmlns:a16="http://schemas.microsoft.com/office/drawing/2014/main" id="{4F710C46-E3B1-4063-BEC9-D6345B20D725}"/>
               </a:ext>
             </a:extLst>
           </p:cNvPr>
@@ -3787,7 +3787,7 @@
           <p:cNvPr id="11" name="">
             <a:extLst xmlns:a="http://schemas.openxmlformats.org/drawingml/2006/main">
               <a:ext uri="{FF2B5EF4-FFF2-40B4-BE49-F238E27FC236}">
-                <a16:creationId xmlns:a16="http://schemas.microsoft.com/office/drawing/2014/main" id="{44DFFF9A-1A02-42F5-A65C-978707AAEC40}"/>
+                <a16:creationId xmlns:a16="http://schemas.microsoft.com/office/drawing/2014/main" id="{47A895A6-6923-4E94-AE46-B412BA8FFFEA}"/>
               </a:ext>
             </a:extLst>
           </p:cNvPr>
@@ -3821,7 +3821,7 @@
           <p:cNvPr id="12" name="">
             <a:extLst xmlns:a="http://schemas.openxmlformats.org/drawingml/2006/main">
               <a:ext uri="{FF2B5EF4-FFF2-40B4-BE49-F238E27FC236}">
-                <a16:creationId xmlns:a16="http://schemas.microsoft.com/office/drawing/2014/main" id="{843608C3-07D7-4993-9772-EA9CCB36F205}"/>
+                <a16:creationId xmlns:a16="http://schemas.microsoft.com/office/drawing/2014/main" id="{DC3AE656-7E99-492E-9E52-BCD1B820AC0E}"/>
               </a:ext>
             </a:extLst>
           </p:cNvPr>
@@ -3878,7 +3878,7 @@
           <p:cNvPr id="13" name="">
             <a:extLst xmlns:a="http://schemas.openxmlformats.org/drawingml/2006/main">
               <a:ext uri="{FF2B5EF4-FFF2-40B4-BE49-F238E27FC236}">
-                <a16:creationId xmlns:a16="http://schemas.microsoft.com/office/drawing/2014/main" id="{0AE4D8E7-8C39-40AD-B6E7-316AA5520136}"/>
+                <a16:creationId xmlns:a16="http://schemas.microsoft.com/office/drawing/2014/main" id="{E5A5863F-1B47-4363-9C61-BBDFAD419837}"/>
               </a:ext>
             </a:extLst>
           </p:cNvPr>
@@ -3935,7 +3935,7 @@
           <p:cNvPr id="14" name="">
             <a:extLst xmlns:a="http://schemas.openxmlformats.org/drawingml/2006/main">
               <a:ext uri="{FF2B5EF4-FFF2-40B4-BE49-F238E27FC236}">
-                <a16:creationId xmlns:a16="http://schemas.microsoft.com/office/drawing/2014/main" id="{3AFEFAC0-1518-4FD0-B815-6C3C3BE0A4EF}"/>
+                <a16:creationId xmlns:a16="http://schemas.microsoft.com/office/drawing/2014/main" id="{F2A6359B-C616-4EB0-B168-F41DBCC507A0}"/>
               </a:ext>
             </a:extLst>
           </p:cNvPr>
@@ -3992,7 +3992,7 @@
           <p:cNvPr id="15" name="">
             <a:extLst xmlns:a="http://schemas.openxmlformats.org/drawingml/2006/main">
               <a:ext uri="{FF2B5EF4-FFF2-40B4-BE49-F238E27FC236}">
-                <a16:creationId xmlns:a16="http://schemas.microsoft.com/office/drawing/2014/main" id="{7AB7D3C5-9CA9-4057-BDC3-3A676DDC1038}"/>
+                <a16:creationId xmlns:a16="http://schemas.microsoft.com/office/drawing/2014/main" id="{25FD1CF6-359B-4721-852B-3ABCB6B63F05}"/>
               </a:ext>
             </a:extLst>
           </p:cNvPr>
@@ -4026,7 +4026,7 @@
           <p:cNvPr id="16" name="">
             <a:extLst xmlns:a="http://schemas.openxmlformats.org/drawingml/2006/main">
               <a:ext uri="{FF2B5EF4-FFF2-40B4-BE49-F238E27FC236}">
-                <a16:creationId xmlns:a16="http://schemas.microsoft.com/office/drawing/2014/main" id="{0822696C-49F7-4FE6-A048-1C910550C97B}"/>
+                <a16:creationId xmlns:a16="http://schemas.microsoft.com/office/drawing/2014/main" id="{81B73B28-8FE1-4FDC-B0FE-75D05C9ACDE3}"/>
               </a:ext>
             </a:extLst>
           </p:cNvPr>
@@ -4083,7 +4083,7 @@
           <p:cNvPr id="17" name="">
             <a:extLst xmlns:a="http://schemas.openxmlformats.org/drawingml/2006/main">
               <a:ext uri="{FF2B5EF4-FFF2-40B4-BE49-F238E27FC236}">
-                <a16:creationId xmlns:a16="http://schemas.microsoft.com/office/drawing/2014/main" id="{0181DEA2-11DF-4C65-805D-CB27B92D7C62}"/>
+                <a16:creationId xmlns:a16="http://schemas.microsoft.com/office/drawing/2014/main" id="{17EB90CC-E0EF-4623-AC45-2F062E58E335}"/>
               </a:ext>
             </a:extLst>
           </p:cNvPr>
@@ -4140,7 +4140,7 @@
           <p:cNvPr id="18" name="">
             <a:extLst xmlns:a="http://schemas.openxmlformats.org/drawingml/2006/main">
               <a:ext uri="{FF2B5EF4-FFF2-40B4-BE49-F238E27FC236}">
-                <a16:creationId xmlns:a16="http://schemas.microsoft.com/office/drawing/2014/main" id="{B875AB63-5B9B-4E4B-8B0B-DCE94725D676}"/>
+                <a16:creationId xmlns:a16="http://schemas.microsoft.com/office/drawing/2014/main" id="{924953CE-0326-4CBB-BEE2-13EA9EFE8DAC}"/>
               </a:ext>
             </a:extLst>
           </p:cNvPr>
@@ -4195,7 +4195,7 @@
     </p:spTree>
     <p:extLst>
       <p:ext uri="{BB962C8B-B14F-4D97-AF65-F5344CB8AC3E}">
-        <p14:creationId xmlns:p14="http://schemas.microsoft.com/office/powerpoint/2010/main" val="2008430721"/>
+        <p14:creationId xmlns:p14="http://schemas.microsoft.com/office/powerpoint/2010/main" val="612259923"/>
       </p:ext>
     </p:extLst>
   </p:cSld>
@@ -4350,7 +4350,7 @@
           <p:cNvPr id="23" name="">
             <a:extLst xmlns:a="http://schemas.openxmlformats.org/drawingml/2006/main">
               <a:ext uri="{FF2B5EF4-FFF2-40B4-BE49-F238E27FC236}">
-                <a16:creationId xmlns:a16="http://schemas.microsoft.com/office/drawing/2014/main" id="{AFA43DD9-7B3F-4CC5-8978-A9AA22233981}"/>
+                <a16:creationId xmlns:a16="http://schemas.microsoft.com/office/drawing/2014/main" id="{34895ED8-E299-4286-A362-6190DB1D4A22}"/>
               </a:ext>
             </a:extLst>
           </p:cNvPr>
@@ -4382,7 +4382,7 @@
           <p:cNvPr id="2" name="">
             <a:extLst xmlns:a="http://schemas.openxmlformats.org/drawingml/2006/main">
               <a:ext uri="{FF2B5EF4-FFF2-40B4-BE49-F238E27FC236}">
-                <a16:creationId xmlns:a16="http://schemas.microsoft.com/office/drawing/2014/main" id="{2DDC3A78-50A9-4301-8C8B-192EF0263A0E}"/>
+                <a16:creationId xmlns:a16="http://schemas.microsoft.com/office/drawing/2014/main" id="{E208A705-763A-4ECE-94C0-971DD7EFBC44}"/>
               </a:ext>
             </a:extLst>
           </p:cNvPr>
@@ -4439,7 +4439,7 @@
           <p:cNvPr id="3" name="">
             <a:extLst xmlns:a="http://schemas.openxmlformats.org/drawingml/2006/main">
               <a:ext uri="{FF2B5EF4-FFF2-40B4-BE49-F238E27FC236}">
-                <a16:creationId xmlns:a16="http://schemas.microsoft.com/office/drawing/2014/main" id="{F3286666-B3C2-4631-AC78-840A01CC9E73}"/>
+                <a16:creationId xmlns:a16="http://schemas.microsoft.com/office/drawing/2014/main" id="{C9ECB43E-9E67-4E20-B2DB-6CF930BF1B20}"/>
               </a:ext>
             </a:extLst>
           </p:cNvPr>
@@ -4471,7 +4471,7 @@
           <p:cNvPr id="4" name="">
             <a:extLst xmlns:a="http://schemas.openxmlformats.org/drawingml/2006/main">
               <a:ext uri="{FF2B5EF4-FFF2-40B4-BE49-F238E27FC236}">
-                <a16:creationId xmlns:a16="http://schemas.microsoft.com/office/drawing/2014/main" id="{53C3B7A4-2F97-45D8-8C0A-338675ECD889}"/>
+                <a16:creationId xmlns:a16="http://schemas.microsoft.com/office/drawing/2014/main" id="{9F03D495-8805-4BCA-AFA5-D7E653A35CC2}"/>
               </a:ext>
             </a:extLst>
           </p:cNvPr>
@@ -4528,7 +4528,7 @@
           <p:cNvPr id="5" name="">
             <a:extLst xmlns:a="http://schemas.openxmlformats.org/drawingml/2006/main">
               <a:ext uri="{FF2B5EF4-FFF2-40B4-BE49-F238E27FC236}">
-                <a16:creationId xmlns:a16="http://schemas.microsoft.com/office/drawing/2014/main" id="{F897E2D2-184A-4335-829E-333EDCAD164C}"/>
+                <a16:creationId xmlns:a16="http://schemas.microsoft.com/office/drawing/2014/main" id="{AB2C6832-4B35-4915-A0B7-DDC58E8EA50D}"/>
               </a:ext>
             </a:extLst>
           </p:cNvPr>
@@ -4585,7 +4585,7 @@
           <p:cNvPr id="6" name="">
             <a:extLst xmlns:a="http://schemas.openxmlformats.org/drawingml/2006/main">
               <a:ext uri="{FF2B5EF4-FFF2-40B4-BE49-F238E27FC236}">
-                <a16:creationId xmlns:a16="http://schemas.microsoft.com/office/drawing/2014/main" id="{75BE5F58-12ED-4A0A-BBDB-4E28B62EBDB1}"/>
+                <a16:creationId xmlns:a16="http://schemas.microsoft.com/office/drawing/2014/main" id="{E7E71069-C715-449D-B94E-86DA99BEF7AE}"/>
               </a:ext>
             </a:extLst>
           </p:cNvPr>
@@ -4642,7 +4642,7 @@
           <p:cNvPr id="7" name="">
             <a:extLst xmlns:a="http://schemas.openxmlformats.org/drawingml/2006/main">
               <a:ext uri="{FF2B5EF4-FFF2-40B4-BE49-F238E27FC236}">
-                <a16:creationId xmlns:a16="http://schemas.microsoft.com/office/drawing/2014/main" id="{29866839-2F65-459A-8ED1-B74D15493279}"/>
+                <a16:creationId xmlns:a16="http://schemas.microsoft.com/office/drawing/2014/main" id="{3C74E03D-1F28-4772-8C15-4F9B713D3766}"/>
               </a:ext>
             </a:extLst>
           </p:cNvPr>
@@ -4674,7 +4674,7 @@
           <p:cNvPr id="8" name="">
             <a:extLst xmlns:a="http://schemas.openxmlformats.org/drawingml/2006/main">
               <a:ext uri="{FF2B5EF4-FFF2-40B4-BE49-F238E27FC236}">
-                <a16:creationId xmlns:a16="http://schemas.microsoft.com/office/drawing/2014/main" id="{7698CA5D-20A6-4109-9709-28551727A5FD}"/>
+                <a16:creationId xmlns:a16="http://schemas.microsoft.com/office/drawing/2014/main" id="{21336FEA-5FBC-4D54-8D9C-49F3342FB13C}"/>
               </a:ext>
             </a:extLst>
           </p:cNvPr>
@@ -4731,7 +4731,7 @@
           <p:cNvPr id="9" name="">
             <a:extLst xmlns:a="http://schemas.openxmlformats.org/drawingml/2006/main">
               <a:ext uri="{FF2B5EF4-FFF2-40B4-BE49-F238E27FC236}">
-                <a16:creationId xmlns:a16="http://schemas.microsoft.com/office/drawing/2014/main" id="{F6BC7DBD-055B-435A-9C8B-46767EC954F4}"/>
+                <a16:creationId xmlns:a16="http://schemas.microsoft.com/office/drawing/2014/main" id="{019A683F-8BC9-4453-A3F2-9BBC16269583}"/>
               </a:ext>
             </a:extLst>
           </p:cNvPr>
@@ -4788,7 +4788,7 @@
           <p:cNvPr id="10" name="">
             <a:extLst xmlns:a="http://schemas.openxmlformats.org/drawingml/2006/main">
               <a:ext uri="{FF2B5EF4-FFF2-40B4-BE49-F238E27FC236}">
-                <a16:creationId xmlns:a16="http://schemas.microsoft.com/office/drawing/2014/main" id="{0FFA385C-18B0-4819-866A-82A4030E2D26}"/>
+                <a16:creationId xmlns:a16="http://schemas.microsoft.com/office/drawing/2014/main" id="{A3A06031-0A10-42B2-A7F2-DEE2A443E189}"/>
               </a:ext>
             </a:extLst>
           </p:cNvPr>
@@ -4822,7 +4822,7 @@
           <p:cNvPr id="11" name="">
             <a:extLst xmlns:a="http://schemas.openxmlformats.org/drawingml/2006/main">
               <a:ext uri="{FF2B5EF4-FFF2-40B4-BE49-F238E27FC236}">
-                <a16:creationId xmlns:a16="http://schemas.microsoft.com/office/drawing/2014/main" id="{D686999F-97B1-4F70-852D-15D9841490F6}"/>
+                <a16:creationId xmlns:a16="http://schemas.microsoft.com/office/drawing/2014/main" id="{622993DE-8E70-417F-BD54-2671462BE113}"/>
               </a:ext>
             </a:extLst>
           </p:cNvPr>
@@ -4854,7 +4854,7 @@
           <p:cNvPr id="12" name="">
             <a:extLst xmlns:a="http://schemas.openxmlformats.org/drawingml/2006/main">
               <a:ext uri="{FF2B5EF4-FFF2-40B4-BE49-F238E27FC236}">
-                <a16:creationId xmlns:a16="http://schemas.microsoft.com/office/drawing/2014/main" id="{83189DB3-11A7-48D6-84B1-C8528007827E}"/>
+                <a16:creationId xmlns:a16="http://schemas.microsoft.com/office/drawing/2014/main" id="{471CD45F-0D0C-4F00-AB46-E472BB718D78}"/>
               </a:ext>
             </a:extLst>
           </p:cNvPr>
@@ -4911,7 +4911,7 @@
           <p:cNvPr id="13" name="">
             <a:extLst xmlns:a="http://schemas.openxmlformats.org/drawingml/2006/main">
               <a:ext uri="{FF2B5EF4-FFF2-40B4-BE49-F238E27FC236}">
-                <a16:creationId xmlns:a16="http://schemas.microsoft.com/office/drawing/2014/main" id="{1B32E962-58FE-4B65-A477-9233E02951D8}"/>
+                <a16:creationId xmlns:a16="http://schemas.microsoft.com/office/drawing/2014/main" id="{479ED282-F562-45AE-A070-15B9D4352885}"/>
               </a:ext>
             </a:extLst>
           </p:cNvPr>
@@ -4968,7 +4968,7 @@
           <p:cNvPr id="14" name="">
             <a:extLst xmlns:a="http://schemas.openxmlformats.org/drawingml/2006/main">
               <a:ext uri="{FF2B5EF4-FFF2-40B4-BE49-F238E27FC236}">
-                <a16:creationId xmlns:a16="http://schemas.microsoft.com/office/drawing/2014/main" id="{363D8CAF-9FCE-4030-BF48-FFA4BC22FCC4}"/>
+                <a16:creationId xmlns:a16="http://schemas.microsoft.com/office/drawing/2014/main" id="{AB0BB471-5B3A-41EE-8643-9EBB2F543BBE}"/>
               </a:ext>
             </a:extLst>
           </p:cNvPr>
@@ -5002,7 +5002,7 @@
           <p:cNvPr id="15" name="">
             <a:extLst xmlns:a="http://schemas.openxmlformats.org/drawingml/2006/main">
               <a:ext uri="{FF2B5EF4-FFF2-40B4-BE49-F238E27FC236}">
-                <a16:creationId xmlns:a16="http://schemas.microsoft.com/office/drawing/2014/main" id="{CFCB20F4-734B-49A0-9731-D76A327B258C}"/>
+                <a16:creationId xmlns:a16="http://schemas.microsoft.com/office/drawing/2014/main" id="{5E6882A8-A59B-4391-AAFA-FCE89DB53754}"/>
               </a:ext>
             </a:extLst>
           </p:cNvPr>
@@ -5034,7 +5034,7 @@
           <p:cNvPr id="16" name="">
             <a:extLst xmlns:a="http://schemas.openxmlformats.org/drawingml/2006/main">
               <a:ext uri="{FF2B5EF4-FFF2-40B4-BE49-F238E27FC236}">
-                <a16:creationId xmlns:a16="http://schemas.microsoft.com/office/drawing/2014/main" id="{A0517DA1-6744-4BA4-B2C9-A67669D27B90}"/>
+                <a16:creationId xmlns:a16="http://schemas.microsoft.com/office/drawing/2014/main" id="{83EFCAE6-5D8C-4020-823C-80CBD0CBC316}"/>
               </a:ext>
             </a:extLst>
           </p:cNvPr>
@@ -5091,7 +5091,7 @@
           <p:cNvPr id="17" name="">
             <a:extLst xmlns:a="http://schemas.openxmlformats.org/drawingml/2006/main">
               <a:ext uri="{FF2B5EF4-FFF2-40B4-BE49-F238E27FC236}">
-                <a16:creationId xmlns:a16="http://schemas.microsoft.com/office/drawing/2014/main" id="{2A11D14D-E09C-4E50-A928-2DFD3AD1F66D}"/>
+                <a16:creationId xmlns:a16="http://schemas.microsoft.com/office/drawing/2014/main" id="{7155EB33-2A7D-45F5-908A-FD09A69352EA}"/>
               </a:ext>
             </a:extLst>
           </p:cNvPr>
@@ -5148,7 +5148,7 @@
           <p:cNvPr id="18" name="">
             <a:extLst xmlns:a="http://schemas.openxmlformats.org/drawingml/2006/main">
               <a:ext uri="{FF2B5EF4-FFF2-40B4-BE49-F238E27FC236}">
-                <a16:creationId xmlns:a16="http://schemas.microsoft.com/office/drawing/2014/main" id="{6BF828B0-D471-412A-BE5B-7AED4F4E0A87}"/>
+                <a16:creationId xmlns:a16="http://schemas.microsoft.com/office/drawing/2014/main" id="{0860B040-82FF-4E6B-ABE8-82A0F3448E1E}"/>
               </a:ext>
             </a:extLst>
           </p:cNvPr>
@@ -5182,7 +5182,7 @@
           <p:cNvPr id="19" name="">
             <a:extLst xmlns:a="http://schemas.openxmlformats.org/drawingml/2006/main">
               <a:ext uri="{FF2B5EF4-FFF2-40B4-BE49-F238E27FC236}">
-                <a16:creationId xmlns:a16="http://schemas.microsoft.com/office/drawing/2014/main" id="{82A669E3-FC78-4A70-B0AA-C3609CC66468}"/>
+                <a16:creationId xmlns:a16="http://schemas.microsoft.com/office/drawing/2014/main" id="{0AABED68-3D1A-4624-8B47-0EAF7E3C43E7}"/>
               </a:ext>
             </a:extLst>
           </p:cNvPr>
@@ -5214,7 +5214,7 @@
           <p:cNvPr id="20" name="">
             <a:extLst xmlns:a="http://schemas.openxmlformats.org/drawingml/2006/main">
               <a:ext uri="{FF2B5EF4-FFF2-40B4-BE49-F238E27FC236}">
-                <a16:creationId xmlns:a16="http://schemas.microsoft.com/office/drawing/2014/main" id="{B9E70F29-F0AA-4609-86FE-0B48972ABE38}"/>
+                <a16:creationId xmlns:a16="http://schemas.microsoft.com/office/drawing/2014/main" id="{E74AFC63-F351-41ED-8247-256BBAB0AFCD}"/>
               </a:ext>
             </a:extLst>
           </p:cNvPr>
@@ -5271,7 +5271,7 @@
           <p:cNvPr id="21" name="">
             <a:extLst xmlns:a="http://schemas.openxmlformats.org/drawingml/2006/main">
               <a:ext uri="{FF2B5EF4-FFF2-40B4-BE49-F238E27FC236}">
-                <a16:creationId xmlns:a16="http://schemas.microsoft.com/office/drawing/2014/main" id="{5E14C620-F738-4CDA-BC02-9433784DDDEB}"/>
+                <a16:creationId xmlns:a16="http://schemas.microsoft.com/office/drawing/2014/main" id="{98768CFC-6523-4887-9CAE-3649F7AC11FF}"/>
               </a:ext>
             </a:extLst>
           </p:cNvPr>
@@ -5328,7 +5328,7 @@
           <p:cNvPr id="22" name="">
             <a:extLst xmlns:a="http://schemas.openxmlformats.org/drawingml/2006/main">
               <a:ext uri="{FF2B5EF4-FFF2-40B4-BE49-F238E27FC236}">
-                <a16:creationId xmlns:a16="http://schemas.microsoft.com/office/drawing/2014/main" id="{918DDA4D-2443-4628-85B4-BBB1322C4B2D}"/>
+                <a16:creationId xmlns:a16="http://schemas.microsoft.com/office/drawing/2014/main" id="{09A3FCB0-D367-46A2-8D9A-29310AB5092A}"/>
               </a:ext>
             </a:extLst>
           </p:cNvPr>
@@ -5383,7 +5383,7 @@
     </p:spTree>
     <p:extLst>
       <p:ext uri="{BB962C8B-B14F-4D97-AF65-F5344CB8AC3E}">
-        <p14:creationId xmlns:p14="http://schemas.microsoft.com/office/powerpoint/2010/main" val="994982484"/>
+        <p14:creationId xmlns:p14="http://schemas.microsoft.com/office/powerpoint/2010/main" val="448140143"/>
       </p:ext>
     </p:extLst>
   </p:cSld>
@@ -5584,7 +5584,7 @@
           <p:cNvPr id="23" name="">
             <a:extLst xmlns:a="http://schemas.openxmlformats.org/drawingml/2006/main">
               <a:ext uri="{FF2B5EF4-FFF2-40B4-BE49-F238E27FC236}">
-                <a16:creationId xmlns:a16="http://schemas.microsoft.com/office/drawing/2014/main" id="{DC96CC96-67A9-4A93-BFCF-407842BEE860}"/>
+                <a16:creationId xmlns:a16="http://schemas.microsoft.com/office/drawing/2014/main" id="{C35B3083-D4A3-4824-80FD-EE30A689F410}"/>
               </a:ext>
             </a:extLst>
           </p:cNvPr>
@@ -5616,7 +5616,7 @@
           <p:cNvPr id="2" name="">
             <a:extLst xmlns:a="http://schemas.openxmlformats.org/drawingml/2006/main">
               <a:ext uri="{FF2B5EF4-FFF2-40B4-BE49-F238E27FC236}">
-                <a16:creationId xmlns:a16="http://schemas.microsoft.com/office/drawing/2014/main" id="{339FE7DA-FFC1-4051-A812-D68AA0E3251D}"/>
+                <a16:creationId xmlns:a16="http://schemas.microsoft.com/office/drawing/2014/main" id="{2CB05B90-DC8D-412A-ACF4-307F4CEC7F49}"/>
               </a:ext>
             </a:extLst>
           </p:cNvPr>
@@ -5673,7 +5673,7 @@
           <p:cNvPr id="3" name="">
             <a:extLst xmlns:a="http://schemas.openxmlformats.org/drawingml/2006/main">
               <a:ext uri="{FF2B5EF4-FFF2-40B4-BE49-F238E27FC236}">
-                <a16:creationId xmlns:a16="http://schemas.microsoft.com/office/drawing/2014/main" id="{D164F587-B13C-4247-8AFD-AE16C876769A}"/>
+                <a16:creationId xmlns:a16="http://schemas.microsoft.com/office/drawing/2014/main" id="{B2E65539-0B39-4DCA-B2A7-0F3E82A386C1}"/>
               </a:ext>
             </a:extLst>
           </p:cNvPr>
@@ -5705,7 +5705,7 @@
           <p:cNvPr id="4" name="">
             <a:extLst xmlns:a="http://schemas.openxmlformats.org/drawingml/2006/main">
               <a:ext uri="{FF2B5EF4-FFF2-40B4-BE49-F238E27FC236}">
-                <a16:creationId xmlns:a16="http://schemas.microsoft.com/office/drawing/2014/main" id="{0A43DFC8-63AB-477E-9823-F80728FF2FD1}"/>
+                <a16:creationId xmlns:a16="http://schemas.microsoft.com/office/drawing/2014/main" id="{B6F5866C-58FB-4069-AD8B-E53CFE5C79A8}"/>
               </a:ext>
             </a:extLst>
           </p:cNvPr>
@@ -5762,7 +5762,7 @@
           <p:cNvPr id="5" name="">
             <a:extLst xmlns:a="http://schemas.openxmlformats.org/drawingml/2006/main">
               <a:ext uri="{FF2B5EF4-FFF2-40B4-BE49-F238E27FC236}">
-                <a16:creationId xmlns:a16="http://schemas.microsoft.com/office/drawing/2014/main" id="{D651EC3C-3710-4CC4-AAC2-60E569D884AB}"/>
+                <a16:creationId xmlns:a16="http://schemas.microsoft.com/office/drawing/2014/main" id="{7A3E1E79-CF90-4770-8567-9EB3F896BE2C}"/>
               </a:ext>
             </a:extLst>
           </p:cNvPr>
@@ -5819,7 +5819,7 @@
           <p:cNvPr id="6" name="">
             <a:extLst xmlns:a="http://schemas.openxmlformats.org/drawingml/2006/main">
               <a:ext uri="{FF2B5EF4-FFF2-40B4-BE49-F238E27FC236}">
-                <a16:creationId xmlns:a16="http://schemas.microsoft.com/office/drawing/2014/main" id="{BF2A139E-328E-434F-BFD9-1A39B187C8F7}"/>
+                <a16:creationId xmlns:a16="http://schemas.microsoft.com/office/drawing/2014/main" id="{AC5623AE-177C-4DF7-90B4-0FA43A85E989}"/>
               </a:ext>
             </a:extLst>
           </p:cNvPr>
@@ -5876,7 +5876,7 @@
           <p:cNvPr id="7" name="">
             <a:extLst xmlns:a="http://schemas.openxmlformats.org/drawingml/2006/main">
               <a:ext uri="{FF2B5EF4-FFF2-40B4-BE49-F238E27FC236}">
-                <a16:creationId xmlns:a16="http://schemas.microsoft.com/office/drawing/2014/main" id="{11BEFE44-873E-4269-B658-E3D5AA87070C}"/>
+                <a16:creationId xmlns:a16="http://schemas.microsoft.com/office/drawing/2014/main" id="{64020C58-9738-4362-8884-282A1A523A4C}"/>
               </a:ext>
             </a:extLst>
           </p:cNvPr>
@@ -5908,7 +5908,7 @@
           <p:cNvPr id="8" name="">
             <a:extLst xmlns:a="http://schemas.openxmlformats.org/drawingml/2006/main">
               <a:ext uri="{FF2B5EF4-FFF2-40B4-BE49-F238E27FC236}">
-                <a16:creationId xmlns:a16="http://schemas.microsoft.com/office/drawing/2014/main" id="{7EF65050-9A2C-4E9E-A4AF-DE5B485E217E}"/>
+                <a16:creationId xmlns:a16="http://schemas.microsoft.com/office/drawing/2014/main" id="{6EA5E452-BD11-433D-85F6-1B336B8A7D3A}"/>
               </a:ext>
             </a:extLst>
           </p:cNvPr>
@@ -5965,7 +5965,7 @@
           <p:cNvPr id="9" name="">
             <a:extLst xmlns:a="http://schemas.openxmlformats.org/drawingml/2006/main">
               <a:ext uri="{FF2B5EF4-FFF2-40B4-BE49-F238E27FC236}">
-                <a16:creationId xmlns:a16="http://schemas.microsoft.com/office/drawing/2014/main" id="{BF98F7FE-6D9B-4167-A54A-2400904AABD9}"/>
+                <a16:creationId xmlns:a16="http://schemas.microsoft.com/office/drawing/2014/main" id="{192DEF5F-A069-441E-812E-D08D84B2D2C3}"/>
               </a:ext>
             </a:extLst>
           </p:cNvPr>
@@ -6022,7 +6022,7 @@
           <p:cNvPr id="10" name="">
             <a:extLst xmlns:a="http://schemas.openxmlformats.org/drawingml/2006/main">
               <a:ext uri="{FF2B5EF4-FFF2-40B4-BE49-F238E27FC236}">
-                <a16:creationId xmlns:a16="http://schemas.microsoft.com/office/drawing/2014/main" id="{4D24F384-DDB7-4467-AC56-BF6B1923E238}"/>
+                <a16:creationId xmlns:a16="http://schemas.microsoft.com/office/drawing/2014/main" id="{DE6D1B2D-0702-44A5-908C-FB7F331AB9B9}"/>
               </a:ext>
             </a:extLst>
           </p:cNvPr>
@@ -6056,7 +6056,7 @@
           <p:cNvPr id="11" name="">
             <a:extLst xmlns:a="http://schemas.openxmlformats.org/drawingml/2006/main">
               <a:ext uri="{FF2B5EF4-FFF2-40B4-BE49-F238E27FC236}">
-                <a16:creationId xmlns:a16="http://schemas.microsoft.com/office/drawing/2014/main" id="{2927937A-BDD8-47D6-818A-53BA44E5A45B}"/>
+                <a16:creationId xmlns:a16="http://schemas.microsoft.com/office/drawing/2014/main" id="{E57CB894-B647-4AFA-A4C4-C89232BA19EB}"/>
               </a:ext>
             </a:extLst>
           </p:cNvPr>
@@ -6088,7 +6088,7 @@
           <p:cNvPr id="12" name="">
             <a:extLst xmlns:a="http://schemas.openxmlformats.org/drawingml/2006/main">
               <a:ext uri="{FF2B5EF4-FFF2-40B4-BE49-F238E27FC236}">
-                <a16:creationId xmlns:a16="http://schemas.microsoft.com/office/drawing/2014/main" id="{359C2BCE-0DE2-4048-80DD-6ABE5EFA0A4F}"/>
+                <a16:creationId xmlns:a16="http://schemas.microsoft.com/office/drawing/2014/main" id="{91739579-AC4F-4A27-885E-EE6EF4362A16}"/>
               </a:ext>
             </a:extLst>
           </p:cNvPr>
@@ -6145,7 +6145,7 @@
           <p:cNvPr id="13" name="">
             <a:extLst xmlns:a="http://schemas.openxmlformats.org/drawingml/2006/main">
               <a:ext uri="{FF2B5EF4-FFF2-40B4-BE49-F238E27FC236}">
-                <a16:creationId xmlns:a16="http://schemas.microsoft.com/office/drawing/2014/main" id="{43DB1FF6-0B89-47CB-A2BB-7CD06A9BBA13}"/>
+                <a16:creationId xmlns:a16="http://schemas.microsoft.com/office/drawing/2014/main" id="{F096208C-E882-49D6-B055-549E585BA023}"/>
               </a:ext>
             </a:extLst>
           </p:cNvPr>
@@ -6202,7 +6202,7 @@
           <p:cNvPr id="14" name="">
             <a:extLst xmlns:a="http://schemas.openxmlformats.org/drawingml/2006/main">
               <a:ext uri="{FF2B5EF4-FFF2-40B4-BE49-F238E27FC236}">
-                <a16:creationId xmlns:a16="http://schemas.microsoft.com/office/drawing/2014/main" id="{12888D80-9F04-4242-B1BC-6C506B50BB50}"/>
+                <a16:creationId xmlns:a16="http://schemas.microsoft.com/office/drawing/2014/main" id="{A9564656-107B-4DDD-8224-504F59737565}"/>
               </a:ext>
             </a:extLst>
           </p:cNvPr>
@@ -6236,7 +6236,7 @@
           <p:cNvPr id="15" name="">
             <a:extLst xmlns:a="http://schemas.openxmlformats.org/drawingml/2006/main">
               <a:ext uri="{FF2B5EF4-FFF2-40B4-BE49-F238E27FC236}">
-                <a16:creationId xmlns:a16="http://schemas.microsoft.com/office/drawing/2014/main" id="{5A8174B7-504C-44A4-9AB5-82D89F25252A}"/>
+                <a16:creationId xmlns:a16="http://schemas.microsoft.com/office/drawing/2014/main" id="{40D44EE5-19C0-4168-B91F-E7A2E86CD90F}"/>
               </a:ext>
             </a:extLst>
           </p:cNvPr>
@@ -6268,7 +6268,7 @@
           <p:cNvPr id="16" name="">
             <a:extLst xmlns:a="http://schemas.openxmlformats.org/drawingml/2006/main">
               <a:ext uri="{FF2B5EF4-FFF2-40B4-BE49-F238E27FC236}">
-                <a16:creationId xmlns:a16="http://schemas.microsoft.com/office/drawing/2014/main" id="{686D8BD5-DBC9-4AAB-9195-B74D850A64D3}"/>
+                <a16:creationId xmlns:a16="http://schemas.microsoft.com/office/drawing/2014/main" id="{116A8321-CFC7-4F77-9DDF-5EE94A2BF54C}"/>
               </a:ext>
             </a:extLst>
           </p:cNvPr>
@@ -6325,7 +6325,7 @@
           <p:cNvPr id="17" name="">
             <a:extLst xmlns:a="http://schemas.openxmlformats.org/drawingml/2006/main">
               <a:ext uri="{FF2B5EF4-FFF2-40B4-BE49-F238E27FC236}">
-                <a16:creationId xmlns:a16="http://schemas.microsoft.com/office/drawing/2014/main" id="{99A6AF4E-B05E-4D87-A8FA-CFA0D36B96A1}"/>
+                <a16:creationId xmlns:a16="http://schemas.microsoft.com/office/drawing/2014/main" id="{FA23261D-6FA2-4606-9259-4815249A107B}"/>
               </a:ext>
             </a:extLst>
           </p:cNvPr>
@@ -6382,7 +6382,7 @@
           <p:cNvPr id="18" name="">
             <a:extLst xmlns:a="http://schemas.openxmlformats.org/drawingml/2006/main">
               <a:ext uri="{FF2B5EF4-FFF2-40B4-BE49-F238E27FC236}">
-                <a16:creationId xmlns:a16="http://schemas.microsoft.com/office/drawing/2014/main" id="{FAAC55FC-E6D3-4832-A9C9-3F5910E3CA7A}"/>
+                <a16:creationId xmlns:a16="http://schemas.microsoft.com/office/drawing/2014/main" id="{4C56CC9B-3E27-4EFC-B56F-B8355DD3EE5E}"/>
               </a:ext>
             </a:extLst>
           </p:cNvPr>
@@ -6416,7 +6416,7 @@
           <p:cNvPr id="19" name="">
             <a:extLst xmlns:a="http://schemas.openxmlformats.org/drawingml/2006/main">
               <a:ext uri="{FF2B5EF4-FFF2-40B4-BE49-F238E27FC236}">
-                <a16:creationId xmlns:a16="http://schemas.microsoft.com/office/drawing/2014/main" id="{FFDD02C4-0C10-4BED-9692-1BFF15A14480}"/>
+                <a16:creationId xmlns:a16="http://schemas.microsoft.com/office/drawing/2014/main" id="{A29CCE96-82CA-43F1-A2AE-82AF4EB66421}"/>
               </a:ext>
             </a:extLst>
           </p:cNvPr>
@@ -6448,7 +6448,7 @@
           <p:cNvPr id="20" name="">
             <a:extLst xmlns:a="http://schemas.openxmlformats.org/drawingml/2006/main">
               <a:ext uri="{FF2B5EF4-FFF2-40B4-BE49-F238E27FC236}">
-                <a16:creationId xmlns:a16="http://schemas.microsoft.com/office/drawing/2014/main" id="{02236DA4-9236-408E-800C-226F3104D8FA}"/>
+                <a16:creationId xmlns:a16="http://schemas.microsoft.com/office/drawing/2014/main" id="{711E8D53-65F2-4899-BF0D-B2CFC04D21BA}"/>
               </a:ext>
             </a:extLst>
           </p:cNvPr>
@@ -6505,7 +6505,7 @@
           <p:cNvPr id="21" name="">
             <a:extLst xmlns:a="http://schemas.openxmlformats.org/drawingml/2006/main">
               <a:ext uri="{FF2B5EF4-FFF2-40B4-BE49-F238E27FC236}">
-                <a16:creationId xmlns:a16="http://schemas.microsoft.com/office/drawing/2014/main" id="{37EB3C4D-2E4A-4BB2-B050-A86943D806B5}"/>
+                <a16:creationId xmlns:a16="http://schemas.microsoft.com/office/drawing/2014/main" id="{79FA7D6E-5B4E-4D48-9B6E-EBDD5E260A64}"/>
               </a:ext>
             </a:extLst>
           </p:cNvPr>
@@ -6562,7 +6562,7 @@
           <p:cNvPr id="22" name="">
             <a:extLst xmlns:a="http://schemas.openxmlformats.org/drawingml/2006/main">
               <a:ext uri="{FF2B5EF4-FFF2-40B4-BE49-F238E27FC236}">
-                <a16:creationId xmlns:a16="http://schemas.microsoft.com/office/drawing/2014/main" id="{23A83364-00A3-4106-BF7B-CF7F39A6E46B}"/>
+                <a16:creationId xmlns:a16="http://schemas.microsoft.com/office/drawing/2014/main" id="{09BF20B8-A1A2-471E-B746-C27723B7688E}"/>
               </a:ext>
             </a:extLst>
           </p:cNvPr>
@@ -6617,7 +6617,7 @@
     </p:spTree>
     <p:extLst>
       <p:ext uri="{BB962C8B-B14F-4D97-AF65-F5344CB8AC3E}">
-        <p14:creationId xmlns:p14="http://schemas.microsoft.com/office/powerpoint/2010/main" val="1674062672"/>
+        <p14:creationId xmlns:p14="http://schemas.microsoft.com/office/powerpoint/2010/main" val="851607693"/>
       </p:ext>
     </p:extLst>
   </p:cSld>
@@ -6818,7 +6818,7 @@
           <p:cNvPr id="16" name="">
             <a:extLst xmlns:a="http://schemas.openxmlformats.org/drawingml/2006/main">
               <a:ext uri="{FF2B5EF4-FFF2-40B4-BE49-F238E27FC236}">
-                <a16:creationId xmlns:a16="http://schemas.microsoft.com/office/drawing/2014/main" id="{420DDA75-B48C-4895-A822-7445AB28F2B6}"/>
+                <a16:creationId xmlns:a16="http://schemas.microsoft.com/office/drawing/2014/main" id="{610F3DDE-6046-485B-95E8-9A0CE942040A}"/>
               </a:ext>
             </a:extLst>
           </p:cNvPr>
@@ -6850,7 +6850,7 @@
           <p:cNvPr id="2" name="">
             <a:extLst xmlns:a="http://schemas.openxmlformats.org/drawingml/2006/main">
               <a:ext uri="{FF2B5EF4-FFF2-40B4-BE49-F238E27FC236}">
-                <a16:creationId xmlns:a16="http://schemas.microsoft.com/office/drawing/2014/main" id="{33B9C95C-76E0-4A5D-B900-DC5687AB0062}"/>
+                <a16:creationId xmlns:a16="http://schemas.microsoft.com/office/drawing/2014/main" id="{CB3B20EC-0608-4C7E-BDF5-886512B8456B}"/>
               </a:ext>
             </a:extLst>
           </p:cNvPr>
@@ -6907,7 +6907,7 @@
           <p:cNvPr id="3" name="">
             <a:extLst xmlns:a="http://schemas.openxmlformats.org/drawingml/2006/main">
               <a:ext uri="{FF2B5EF4-FFF2-40B4-BE49-F238E27FC236}">
-                <a16:creationId xmlns:a16="http://schemas.microsoft.com/office/drawing/2014/main" id="{2EE47923-D08B-475C-830E-9F9B91714D3F}"/>
+                <a16:creationId xmlns:a16="http://schemas.microsoft.com/office/drawing/2014/main" id="{72188822-6337-49E5-9516-0F98E263478A}"/>
               </a:ext>
             </a:extLst>
           </p:cNvPr>
@@ -6939,7 +6939,7 @@
           <p:cNvPr id="4" name="">
             <a:extLst xmlns:a="http://schemas.openxmlformats.org/drawingml/2006/main">
               <a:ext uri="{FF2B5EF4-FFF2-40B4-BE49-F238E27FC236}">
-                <a16:creationId xmlns:a16="http://schemas.microsoft.com/office/drawing/2014/main" id="{81EB7E28-0E14-4A3B-928A-B7E807027194}"/>
+                <a16:creationId xmlns:a16="http://schemas.microsoft.com/office/drawing/2014/main" id="{3AB2B99E-9F47-48C5-BA62-4227624B2939}"/>
               </a:ext>
             </a:extLst>
           </p:cNvPr>
@@ -6996,7 +6996,7 @@
           <p:cNvPr id="5" name="">
             <a:extLst xmlns:a="http://schemas.openxmlformats.org/drawingml/2006/main">
               <a:ext uri="{FF2B5EF4-FFF2-40B4-BE49-F238E27FC236}">
-                <a16:creationId xmlns:a16="http://schemas.microsoft.com/office/drawing/2014/main" id="{87CDD597-239F-4238-9DA5-D2E776C84BA8}"/>
+                <a16:creationId xmlns:a16="http://schemas.microsoft.com/office/drawing/2014/main" id="{EE18808D-EED6-4D26-943F-CDC438A370C5}"/>
               </a:ext>
             </a:extLst>
           </p:cNvPr>
@@ -7053,7 +7053,7 @@
           <p:cNvPr id="6" name="">
             <a:extLst xmlns:a="http://schemas.openxmlformats.org/drawingml/2006/main">
               <a:ext uri="{FF2B5EF4-FFF2-40B4-BE49-F238E27FC236}">
-                <a16:creationId xmlns:a16="http://schemas.microsoft.com/office/drawing/2014/main" id="{641DF04D-753A-4DFC-A869-2BE3C0424902}"/>
+                <a16:creationId xmlns:a16="http://schemas.microsoft.com/office/drawing/2014/main" id="{27360919-936B-4E59-89DF-D0D6B7C7D3C1}"/>
               </a:ext>
             </a:extLst>
           </p:cNvPr>
@@ -7110,7 +7110,7 @@
           <p:cNvPr id="7" name="">
             <a:extLst xmlns:a="http://schemas.openxmlformats.org/drawingml/2006/main">
               <a:ext uri="{FF2B5EF4-FFF2-40B4-BE49-F238E27FC236}">
-                <a16:creationId xmlns:a16="http://schemas.microsoft.com/office/drawing/2014/main" id="{745A60C0-CA78-40E2-BDD8-FF762779A346}"/>
+                <a16:creationId xmlns:a16="http://schemas.microsoft.com/office/drawing/2014/main" id="{FDC582E9-36DE-488D-8EB2-37489BC4F500}"/>
               </a:ext>
             </a:extLst>
           </p:cNvPr>
@@ -7142,7 +7142,7 @@
           <p:cNvPr id="8" name="">
             <a:extLst xmlns:a="http://schemas.openxmlformats.org/drawingml/2006/main">
               <a:ext uri="{FF2B5EF4-FFF2-40B4-BE49-F238E27FC236}">
-                <a16:creationId xmlns:a16="http://schemas.microsoft.com/office/drawing/2014/main" id="{916B151C-7F42-44D0-86E5-D0342F6D2949}"/>
+                <a16:creationId xmlns:a16="http://schemas.microsoft.com/office/drawing/2014/main" id="{E08E9A1A-E232-4DA6-989F-C8711113C780}"/>
               </a:ext>
             </a:extLst>
           </p:cNvPr>
@@ -7199,7 +7199,7 @@
           <p:cNvPr id="9" name="">
             <a:extLst xmlns:a="http://schemas.openxmlformats.org/drawingml/2006/main">
               <a:ext uri="{FF2B5EF4-FFF2-40B4-BE49-F238E27FC236}">
-                <a16:creationId xmlns:a16="http://schemas.microsoft.com/office/drawing/2014/main" id="{66CC6DBF-B988-4945-94D9-302A9F7D5195}"/>
+                <a16:creationId xmlns:a16="http://schemas.microsoft.com/office/drawing/2014/main" id="{71878BAB-5BF6-4490-BD83-90A0273CAF90}"/>
               </a:ext>
             </a:extLst>
           </p:cNvPr>
@@ -7256,7 +7256,7 @@
           <p:cNvPr id="10" name="">
             <a:extLst xmlns:a="http://schemas.openxmlformats.org/drawingml/2006/main">
               <a:ext uri="{FF2B5EF4-FFF2-40B4-BE49-F238E27FC236}">
-                <a16:creationId xmlns:a16="http://schemas.microsoft.com/office/drawing/2014/main" id="{73CD0E2A-DF4B-47FA-B9FC-EA7883977AF7}"/>
+                <a16:creationId xmlns:a16="http://schemas.microsoft.com/office/drawing/2014/main" id="{18CA943E-4C2F-4659-A5C5-ECE792F0FF6C}"/>
               </a:ext>
             </a:extLst>
           </p:cNvPr>
@@ -7313,7 +7313,7 @@
           <p:cNvPr id="11" name="">
             <a:extLst xmlns:a="http://schemas.openxmlformats.org/drawingml/2006/main">
               <a:ext uri="{FF2B5EF4-FFF2-40B4-BE49-F238E27FC236}">
-                <a16:creationId xmlns:a16="http://schemas.microsoft.com/office/drawing/2014/main" id="{803433CC-B473-449C-99F4-CFD3F4E23D3A}"/>
+                <a16:creationId xmlns:a16="http://schemas.microsoft.com/office/drawing/2014/main" id="{88783B66-DB49-40F2-8BCF-2961A0DC0421}"/>
               </a:ext>
             </a:extLst>
           </p:cNvPr>
@@ -7345,7 +7345,7 @@
           <p:cNvPr id="12" name="">
             <a:extLst xmlns:a="http://schemas.openxmlformats.org/drawingml/2006/main">
               <a:ext uri="{FF2B5EF4-FFF2-40B4-BE49-F238E27FC236}">
-                <a16:creationId xmlns:a16="http://schemas.microsoft.com/office/drawing/2014/main" id="{F01C3822-B44F-4E91-B2A6-EB4E9FB50128}"/>
+                <a16:creationId xmlns:a16="http://schemas.microsoft.com/office/drawing/2014/main" id="{A8D588D4-91B1-4CE3-BE4D-22E5F4B18EA8}"/>
               </a:ext>
             </a:extLst>
           </p:cNvPr>
@@ -7402,7 +7402,7 @@
           <p:cNvPr id="13" name="">
             <a:extLst xmlns:a="http://schemas.openxmlformats.org/drawingml/2006/main">
               <a:ext uri="{FF2B5EF4-FFF2-40B4-BE49-F238E27FC236}">
-                <a16:creationId xmlns:a16="http://schemas.microsoft.com/office/drawing/2014/main" id="{3A01ED83-7C56-4DDD-AEDC-6C8895F37A3C}"/>
+                <a16:creationId xmlns:a16="http://schemas.microsoft.com/office/drawing/2014/main" id="{72B4CBA7-BA5E-4054-903A-615425FD3EC7}"/>
               </a:ext>
             </a:extLst>
           </p:cNvPr>
@@ -7459,7 +7459,7 @@
           <p:cNvPr id="14" name="">
             <a:extLst xmlns:a="http://schemas.openxmlformats.org/drawingml/2006/main">
               <a:ext uri="{FF2B5EF4-FFF2-40B4-BE49-F238E27FC236}">
-                <a16:creationId xmlns:a16="http://schemas.microsoft.com/office/drawing/2014/main" id="{24899F7B-960F-4A6F-ABB6-3C9FDF47225B}"/>
+                <a16:creationId xmlns:a16="http://schemas.microsoft.com/office/drawing/2014/main" id="{6E695CA5-BC2B-4681-B3D3-842E88335D3A}"/>
               </a:ext>
             </a:extLst>
           </p:cNvPr>
@@ -7516,7 +7516,7 @@
           <p:cNvPr id="15" name="">
             <a:extLst xmlns:a="http://schemas.openxmlformats.org/drawingml/2006/main">
               <a:ext uri="{FF2B5EF4-FFF2-40B4-BE49-F238E27FC236}">
-                <a16:creationId xmlns:a16="http://schemas.microsoft.com/office/drawing/2014/main" id="{A74BCA29-9A2A-4D43-8382-68C71B7FF30F}"/>
+                <a16:creationId xmlns:a16="http://schemas.microsoft.com/office/drawing/2014/main" id="{C53066EF-EC46-42BE-8C6C-6F43536A2654}"/>
               </a:ext>
             </a:extLst>
           </p:cNvPr>
@@ -7571,7 +7571,7 @@
     </p:spTree>
     <p:extLst>
       <p:ext uri="{BB962C8B-B14F-4D97-AF65-F5344CB8AC3E}">
-        <p14:creationId xmlns:p14="http://schemas.microsoft.com/office/powerpoint/2010/main" val="1487479530"/>
+        <p14:creationId xmlns:p14="http://schemas.microsoft.com/office/powerpoint/2010/main" val="1295650890"/>
       </p:ext>
     </p:extLst>
   </p:cSld>
@@ -7772,7 +7772,7 @@
           <p:cNvPr id="23" name="">
             <a:extLst xmlns:a="http://schemas.openxmlformats.org/drawingml/2006/main">
               <a:ext uri="{FF2B5EF4-FFF2-40B4-BE49-F238E27FC236}">
-                <a16:creationId xmlns:a16="http://schemas.microsoft.com/office/drawing/2014/main" id="{9E004C48-6C37-45EC-B0E2-FC9C7E614EF2}"/>
+                <a16:creationId xmlns:a16="http://schemas.microsoft.com/office/drawing/2014/main" id="{CB8313A9-12CD-4390-A825-7D2FADAC7C6A}"/>
               </a:ext>
             </a:extLst>
           </p:cNvPr>
@@ -7804,7 +7804,7 @@
           <p:cNvPr id="2" name="">
             <a:extLst xmlns:a="http://schemas.openxmlformats.org/drawingml/2006/main">
               <a:ext uri="{FF2B5EF4-FFF2-40B4-BE49-F238E27FC236}">
-                <a16:creationId xmlns:a16="http://schemas.microsoft.com/office/drawing/2014/main" id="{17BB41C4-E346-4976-9A68-2FE3FA53423F}"/>
+                <a16:creationId xmlns:a16="http://schemas.microsoft.com/office/drawing/2014/main" id="{06548836-C594-4A99-8E2C-0A7F172C7396}"/>
               </a:ext>
             </a:extLst>
           </p:cNvPr>
@@ -7861,7 +7861,7 @@
           <p:cNvPr id="3" name="">
             <a:extLst xmlns:a="http://schemas.openxmlformats.org/drawingml/2006/main">
               <a:ext uri="{FF2B5EF4-FFF2-40B4-BE49-F238E27FC236}">
-                <a16:creationId xmlns:a16="http://schemas.microsoft.com/office/drawing/2014/main" id="{012DF4FC-91D1-49C5-89FC-3C6B91BAA359}"/>
+                <a16:creationId xmlns:a16="http://schemas.microsoft.com/office/drawing/2014/main" id="{41720AC9-C857-48A6-816B-E6D612754F23}"/>
               </a:ext>
             </a:extLst>
           </p:cNvPr>
@@ -7893,7 +7893,7 @@
           <p:cNvPr id="4" name="">
             <a:extLst xmlns:a="http://schemas.openxmlformats.org/drawingml/2006/main">
               <a:ext uri="{FF2B5EF4-FFF2-40B4-BE49-F238E27FC236}">
-                <a16:creationId xmlns:a16="http://schemas.microsoft.com/office/drawing/2014/main" id="{9F1C6DC3-F9F4-4879-AA9A-F7ADF8E4CBC6}"/>
+                <a16:creationId xmlns:a16="http://schemas.microsoft.com/office/drawing/2014/main" id="{BA2FF34E-717A-405C-AAC2-0B4FD2C23502}"/>
               </a:ext>
             </a:extLst>
           </p:cNvPr>
@@ -7950,7 +7950,7 @@
           <p:cNvPr id="5" name="">
             <a:extLst xmlns:a="http://schemas.openxmlformats.org/drawingml/2006/main">
               <a:ext uri="{FF2B5EF4-FFF2-40B4-BE49-F238E27FC236}">
-                <a16:creationId xmlns:a16="http://schemas.microsoft.com/office/drawing/2014/main" id="{0D9B95DC-C085-4180-842C-8D9D3093B13A}"/>
+                <a16:creationId xmlns:a16="http://schemas.microsoft.com/office/drawing/2014/main" id="{32221718-411C-402A-B48D-5900BDCD22E5}"/>
               </a:ext>
             </a:extLst>
           </p:cNvPr>
@@ -8007,7 +8007,7 @@
           <p:cNvPr id="6" name="">
             <a:extLst xmlns:a="http://schemas.openxmlformats.org/drawingml/2006/main">
               <a:ext uri="{FF2B5EF4-FFF2-40B4-BE49-F238E27FC236}">
-                <a16:creationId xmlns:a16="http://schemas.microsoft.com/office/drawing/2014/main" id="{87FDE01A-AF29-4DC0-938C-3388C57495B3}"/>
+                <a16:creationId xmlns:a16="http://schemas.microsoft.com/office/drawing/2014/main" id="{3E3A5724-8AFE-49D2-AD81-6E80BFDD98A5}"/>
               </a:ext>
             </a:extLst>
           </p:cNvPr>
@@ -8064,7 +8064,7 @@
           <p:cNvPr id="7" name="">
             <a:extLst xmlns:a="http://schemas.openxmlformats.org/drawingml/2006/main">
               <a:ext uri="{FF2B5EF4-FFF2-40B4-BE49-F238E27FC236}">
-                <a16:creationId xmlns:a16="http://schemas.microsoft.com/office/drawing/2014/main" id="{BD74710A-D7FA-4112-BAD7-43E95F2564F6}"/>
+                <a16:creationId xmlns:a16="http://schemas.microsoft.com/office/drawing/2014/main" id="{CBE56582-5079-470B-B76F-3F7A93190380}"/>
               </a:ext>
             </a:extLst>
           </p:cNvPr>
@@ -8096,7 +8096,7 @@
           <p:cNvPr id="8" name="">
             <a:extLst xmlns:a="http://schemas.openxmlformats.org/drawingml/2006/main">
               <a:ext uri="{FF2B5EF4-FFF2-40B4-BE49-F238E27FC236}">
-                <a16:creationId xmlns:a16="http://schemas.microsoft.com/office/drawing/2014/main" id="{BD18BDBB-4225-4132-965A-97D7F55523F4}"/>
+                <a16:creationId xmlns:a16="http://schemas.microsoft.com/office/drawing/2014/main" id="{C3A25A5E-3250-4B3A-B6DC-012133499D72}"/>
               </a:ext>
             </a:extLst>
           </p:cNvPr>
@@ -8153,7 +8153,7 @@
           <p:cNvPr id="9" name="">
             <a:extLst xmlns:a="http://schemas.openxmlformats.org/drawingml/2006/main">
               <a:ext uri="{FF2B5EF4-FFF2-40B4-BE49-F238E27FC236}">
-                <a16:creationId xmlns:a16="http://schemas.microsoft.com/office/drawing/2014/main" id="{51AE8745-C1DD-4EF6-B2F1-CE8723D39DB3}"/>
+                <a16:creationId xmlns:a16="http://schemas.microsoft.com/office/drawing/2014/main" id="{1B15F67D-E4E9-4E3B-9DAF-CDA14624E576}"/>
               </a:ext>
             </a:extLst>
           </p:cNvPr>
@@ -8210,19 +8210,19 @@
           <p:cNvPr id="10" name="">
             <a:extLst xmlns:a="http://schemas.openxmlformats.org/drawingml/2006/main">
               <a:ext uri="{FF2B5EF4-FFF2-40B4-BE49-F238E27FC236}">
-                <a16:creationId xmlns:a16="http://schemas.microsoft.com/office/drawing/2014/main" id="{2267301B-B82C-4A8B-BE7D-90A23E6EDDA2}"/>
-              </a:ext>
-            </a:extLst>
-          </p:cNvPr>
-          <p:cNvSpPr>
-            <a:spLocks xmlns:a="http://schemas.openxmlformats.org/drawingml/2006/main" noGrp="1"/>
-          </p:cNvSpPr>
-          <p:nvPr/>
-        </p:nvSpPr>
-        <p:spPr>
-          <a:xfrm xmlns:a="http://schemas.openxmlformats.org/drawingml/2006/main">
-            <a:off x="914400" y="1257300"/>
-            <a:ext cx="10363200" cy="781050"/>
+                <a16:creationId xmlns:a16="http://schemas.microsoft.com/office/drawing/2014/main" id="{34706C2D-D772-46B6-AA58-AF9E0F84AFF9}"/>
+              </a:ext>
+            </a:extLst>
+          </p:cNvPr>
+          <p:cNvSpPr>
+            <a:spLocks xmlns:a="http://schemas.openxmlformats.org/drawingml/2006/main" noGrp="1"/>
+          </p:cNvSpPr>
+          <p:nvPr/>
+        </p:nvSpPr>
+        <p:spPr>
+          <a:xfrm xmlns:a="http://schemas.openxmlformats.org/drawingml/2006/main">
+            <a:off x="857250" y="1219200"/>
+            <a:ext cx="10477500" cy="742950"/>
           </a:xfrm>
           <a:prstGeom xmlns:a="http://schemas.openxmlformats.org/drawingml/2006/main" prst="rect">
             <a:avLst/>
@@ -8239,7 +8239,7 @@
           <a:lstStyle xmlns:a="http://schemas.openxmlformats.org/drawingml/2006/main"/>
           <a:p xmlns:a="http://schemas.openxmlformats.org/drawingml/2006/main">
             <a:pPr algn="ctr">
-              <a:defRPr sz="2175" b="1">
+              <a:defRPr sz="2100" b="1">
                 <a:solidFill>
                   <a:srgbClr val="17253A"/>
                 </a:solidFill>
@@ -8249,7 +8249,7 @@
               </a:defRPr>
             </a:pPr>
             <a:r>
-              <a:rPr sz="2175" b="1">
+              <a:rPr sz="2100" b="1">
                 <a:solidFill>
                   <a:srgbClr val="17253A"/>
                 </a:solidFill>
@@ -8267,28 +8267,30 @@
           <p:cNvPr id="11" name="">
             <a:extLst xmlns:a="http://schemas.openxmlformats.org/drawingml/2006/main">
               <a:ext uri="{FF2B5EF4-FFF2-40B4-BE49-F238E27FC236}">
-                <a16:creationId xmlns:a16="http://schemas.microsoft.com/office/drawing/2014/main" id="{2C4FA08B-BAFE-4BB6-BD8C-682B4808B890}"/>
-              </a:ext>
-            </a:extLst>
-          </p:cNvPr>
-          <p:cNvSpPr>
-            <a:spLocks xmlns:a="http://schemas.openxmlformats.org/drawingml/2006/main" noGrp="1"/>
-          </p:cNvSpPr>
-          <p:nvPr/>
-        </p:nvSpPr>
-        <p:spPr>
-          <a:xfrm xmlns:a="http://schemas.openxmlformats.org/drawingml/2006/main">
-            <a:off x="1000125" y="2247900"/>
-            <a:ext cx="476250" cy="476250"/>
-          </a:xfrm>
-          <a:prstGeom xmlns:a="http://schemas.openxmlformats.org/drawingml/2006/main" prst="ellipse">
+                <a16:creationId xmlns:a16="http://schemas.microsoft.com/office/drawing/2014/main" id="{CDF1F365-4F55-4485-8DE2-7108E6A8E5FB}"/>
+              </a:ext>
+            </a:extLst>
+          </p:cNvPr>
+          <p:cNvSpPr>
+            <a:spLocks xmlns:a="http://schemas.openxmlformats.org/drawingml/2006/main" noGrp="1"/>
+          </p:cNvSpPr>
+          <p:nvPr/>
+        </p:nvSpPr>
+        <p:spPr>
+          <a:xfrm xmlns:a="http://schemas.openxmlformats.org/drawingml/2006/main">
+            <a:off x="971550" y="2124075"/>
+            <a:ext cx="38100" cy="3524250"/>
+          </a:xfrm>
+          <a:prstGeom xmlns:a="http://schemas.openxmlformats.org/drawingml/2006/main" prst="rect">
             <a:avLst/>
           </a:prstGeom>
           <a:solidFill xmlns:a="http://schemas.openxmlformats.org/drawingml/2006/main">
-            <a:srgbClr val="18324A"/>
+            <a:srgbClr val="2C6E73"/>
           </a:solidFill>
           <a:ln xmlns:a="http://schemas.openxmlformats.org/drawingml/2006/main" w="0">
-            <a:noFill/>
+            <a:solidFill>
+              <a:srgbClr val="2C6E73"/>
+            </a:solidFill>
           </a:ln>
         </p:spPr>
       </p:sp>
@@ -8297,19 +8299,19 @@
           <p:cNvPr id="12" name="">
             <a:extLst xmlns:a="http://schemas.openxmlformats.org/drawingml/2006/main">
               <a:ext uri="{FF2B5EF4-FFF2-40B4-BE49-F238E27FC236}">
-                <a16:creationId xmlns:a16="http://schemas.microsoft.com/office/drawing/2014/main" id="{2075E752-C8AE-463F-924E-16476872D2C7}"/>
-              </a:ext>
-            </a:extLst>
-          </p:cNvPr>
-          <p:cNvSpPr>
-            <a:spLocks xmlns:a="http://schemas.openxmlformats.org/drawingml/2006/main" noGrp="1"/>
-          </p:cNvSpPr>
-          <p:nvPr/>
-        </p:nvSpPr>
-        <p:spPr>
-          <a:xfrm xmlns:a="http://schemas.openxmlformats.org/drawingml/2006/main">
-            <a:off x="1000125" y="2276475"/>
-            <a:ext cx="476250" cy="419100"/>
+                <a16:creationId xmlns:a16="http://schemas.microsoft.com/office/drawing/2014/main" id="{B507866B-022E-47BA-9108-07FD2FE5EA5F}"/>
+              </a:ext>
+            </a:extLst>
+          </p:cNvPr>
+          <p:cNvSpPr>
+            <a:spLocks xmlns:a="http://schemas.openxmlformats.org/drawingml/2006/main" noGrp="1"/>
+          </p:cNvSpPr>
+          <p:nvPr/>
+        </p:nvSpPr>
+        <p:spPr>
+          <a:xfrm xmlns:a="http://schemas.openxmlformats.org/drawingml/2006/main">
+            <a:off x="1162050" y="2200275"/>
+            <a:ext cx="400050" cy="400050"/>
           </a:xfrm>
           <a:prstGeom xmlns:a="http://schemas.openxmlformats.org/drawingml/2006/main" prst="rect">
             <a:avLst/>
@@ -8326,9 +8328,9 @@
           <a:lstStyle xmlns:a="http://schemas.openxmlformats.org/drawingml/2006/main"/>
           <a:p xmlns:a="http://schemas.openxmlformats.org/drawingml/2006/main">
             <a:pPr algn="ctr">
-              <a:defRPr sz="1350" b="1">
-                <a:solidFill>
-                  <a:srgbClr val="FFFFFF"/>
+              <a:defRPr sz="1125" b="1">
+                <a:solidFill>
+                  <a:srgbClr val="2C6E73"/>
                 </a:solidFill>
                 <a:latin typeface="Arial"/>
                 <a:ea typeface="Arial"/>
@@ -8336,9 +8338,9 @@
               </a:defRPr>
             </a:pPr>
             <a:r>
-              <a:rPr sz="1350" b="1">
-                <a:solidFill>
-                  <a:srgbClr val="FFFFFF"/>
+              <a:rPr sz="1125" b="1">
+                <a:solidFill>
+                  <a:srgbClr val="2C6E73"/>
                 </a:solidFill>
                 <a:latin typeface="Arial"/>
                 <a:ea typeface="Arial"/>
@@ -8354,19 +8356,19 @@
           <p:cNvPr id="13" name="">
             <a:extLst xmlns:a="http://schemas.openxmlformats.org/drawingml/2006/main">
               <a:ext uri="{FF2B5EF4-FFF2-40B4-BE49-F238E27FC236}">
-                <a16:creationId xmlns:a16="http://schemas.microsoft.com/office/drawing/2014/main" id="{E3ABE323-813B-45EC-853E-FDBC8FE512A2}"/>
-              </a:ext>
-            </a:extLst>
-          </p:cNvPr>
-          <p:cNvSpPr>
-            <a:spLocks xmlns:a="http://schemas.openxmlformats.org/drawingml/2006/main" noGrp="1"/>
-          </p:cNvSpPr>
-          <p:nvPr/>
-        </p:nvSpPr>
-        <p:spPr>
-          <a:xfrm xmlns:a="http://schemas.openxmlformats.org/drawingml/2006/main">
-            <a:off x="1714500" y="2181225"/>
-            <a:ext cx="9429750" cy="609600"/>
+                <a16:creationId xmlns:a16="http://schemas.microsoft.com/office/drawing/2014/main" id="{5DBE8149-BBFF-433D-988A-B4C08CDEF49B}"/>
+              </a:ext>
+            </a:extLst>
+          </p:cNvPr>
+          <p:cNvSpPr>
+            <a:spLocks xmlns:a="http://schemas.openxmlformats.org/drawingml/2006/main" noGrp="1"/>
+          </p:cNvSpPr>
+          <p:nvPr/>
+        </p:nvSpPr>
+        <p:spPr>
+          <a:xfrm xmlns:a="http://schemas.openxmlformats.org/drawingml/2006/main">
+            <a:off x="1714500" y="2114550"/>
+            <a:ext cx="9525000" cy="809625"/>
           </a:xfrm>
           <a:prstGeom xmlns:a="http://schemas.openxmlformats.org/drawingml/2006/main" prst="rect">
             <a:avLst/>
@@ -8383,7 +8385,7 @@
           <a:lstStyle xmlns:a="http://schemas.openxmlformats.org/drawingml/2006/main"/>
           <a:p xmlns:a="http://schemas.openxmlformats.org/drawingml/2006/main">
             <a:pPr algn="l">
-              <a:defRPr sz="1500" b="0">
+              <a:defRPr sz="1725" b="0">
                 <a:solidFill>
                   <a:srgbClr val="17253A"/>
                 </a:solidFill>
@@ -8393,7 +8395,7 @@
               </a:defRPr>
             </a:pPr>
             <a:r>
-              <a:rPr sz="1500" b="0">
+              <a:rPr sz="1725" b="0">
                 <a:solidFill>
                   <a:srgbClr val="17253A"/>
                 </a:solidFill>
@@ -8401,7 +8403,7 @@
                 <a:ea typeface="Arial"/>
                 <a:cs typeface="Arial"/>
               </a:rPr>
-              <a:t>Identify the structure: Identify the number type and choose an efficient method.</a:t>
+              <a:t>4,725 ÷ 35 = 135</a:t>
             </a:r>
           </a:p>
         </p:txBody>
@@ -8411,28 +8413,30 @@
           <p:cNvPr id="14" name="">
             <a:extLst xmlns:a="http://schemas.openxmlformats.org/drawingml/2006/main">
               <a:ext uri="{FF2B5EF4-FFF2-40B4-BE49-F238E27FC236}">
-                <a16:creationId xmlns:a16="http://schemas.microsoft.com/office/drawing/2014/main" id="{9F08FB58-CF25-483E-AEC1-4661CE5827C7}"/>
-              </a:ext>
-            </a:extLst>
-          </p:cNvPr>
-          <p:cNvSpPr>
-            <a:spLocks xmlns:a="http://schemas.openxmlformats.org/drawingml/2006/main" noGrp="1"/>
-          </p:cNvSpPr>
-          <p:nvPr/>
-        </p:nvSpPr>
-        <p:spPr>
-          <a:xfrm xmlns:a="http://schemas.openxmlformats.org/drawingml/2006/main">
-            <a:off x="1000125" y="2990850"/>
-            <a:ext cx="476250" cy="476250"/>
-          </a:xfrm>
-          <a:prstGeom xmlns:a="http://schemas.openxmlformats.org/drawingml/2006/main" prst="ellipse">
+                <a16:creationId xmlns:a16="http://schemas.microsoft.com/office/drawing/2014/main" id="{5411DA6B-BEFE-4C04-B271-0A549BF4F7F2}"/>
+              </a:ext>
+            </a:extLst>
+          </p:cNvPr>
+          <p:cNvSpPr>
+            <a:spLocks xmlns:a="http://schemas.openxmlformats.org/drawingml/2006/main" noGrp="1"/>
+          </p:cNvSpPr>
+          <p:nvPr/>
+        </p:nvSpPr>
+        <p:spPr>
+          <a:xfrm xmlns:a="http://schemas.openxmlformats.org/drawingml/2006/main">
+            <a:off x="1714500" y="2943225"/>
+            <a:ext cx="9334500" cy="9525"/>
+          </a:xfrm>
+          <a:prstGeom xmlns:a="http://schemas.openxmlformats.org/drawingml/2006/main" prst="rect">
             <a:avLst/>
           </a:prstGeom>
           <a:solidFill xmlns:a="http://schemas.openxmlformats.org/drawingml/2006/main">
-            <a:srgbClr val="2C6E73"/>
+            <a:srgbClr val="D9E0E6"/>
           </a:solidFill>
           <a:ln xmlns:a="http://schemas.openxmlformats.org/drawingml/2006/main" w="0">
-            <a:noFill/>
+            <a:solidFill>
+              <a:srgbClr val="D9E0E6"/>
+            </a:solidFill>
           </a:ln>
         </p:spPr>
       </p:sp>
@@ -8441,19 +8445,19 @@
           <p:cNvPr id="15" name="">
             <a:extLst xmlns:a="http://schemas.openxmlformats.org/drawingml/2006/main">
               <a:ext uri="{FF2B5EF4-FFF2-40B4-BE49-F238E27FC236}">
-                <a16:creationId xmlns:a16="http://schemas.microsoft.com/office/drawing/2014/main" id="{B0CAD2C6-F5F7-40A7-955A-72D2750C78E8}"/>
-              </a:ext>
-            </a:extLst>
-          </p:cNvPr>
-          <p:cNvSpPr>
-            <a:spLocks xmlns:a="http://schemas.openxmlformats.org/drawingml/2006/main" noGrp="1"/>
-          </p:cNvSpPr>
-          <p:nvPr/>
-        </p:nvSpPr>
-        <p:spPr>
-          <a:xfrm xmlns:a="http://schemas.openxmlformats.org/drawingml/2006/main">
-            <a:off x="1000125" y="3019425"/>
-            <a:ext cx="476250" cy="419100"/>
+                <a16:creationId xmlns:a16="http://schemas.microsoft.com/office/drawing/2014/main" id="{591853B2-6CBF-474B-8223-E7F0A5DE4EFD}"/>
+              </a:ext>
+            </a:extLst>
+          </p:cNvPr>
+          <p:cNvSpPr>
+            <a:spLocks xmlns:a="http://schemas.openxmlformats.org/drawingml/2006/main" noGrp="1"/>
+          </p:cNvSpPr>
+          <p:nvPr/>
+        </p:nvSpPr>
+        <p:spPr>
+          <a:xfrm xmlns:a="http://schemas.openxmlformats.org/drawingml/2006/main">
+            <a:off x="1162050" y="3076575"/>
+            <a:ext cx="400050" cy="400050"/>
           </a:xfrm>
           <a:prstGeom xmlns:a="http://schemas.openxmlformats.org/drawingml/2006/main" prst="rect">
             <a:avLst/>
@@ -8470,9 +8474,9 @@
           <a:lstStyle xmlns:a="http://schemas.openxmlformats.org/drawingml/2006/main"/>
           <a:p xmlns:a="http://schemas.openxmlformats.org/drawingml/2006/main">
             <a:pPr algn="ctr">
-              <a:defRPr sz="1350" b="1">
-                <a:solidFill>
-                  <a:srgbClr val="FFFFFF"/>
+              <a:defRPr sz="1125" b="1">
+                <a:solidFill>
+                  <a:srgbClr val="2C6E73"/>
                 </a:solidFill>
                 <a:latin typeface="Arial"/>
                 <a:ea typeface="Arial"/>
@@ -8480,9 +8484,9 @@
               </a:defRPr>
             </a:pPr>
             <a:r>
-              <a:rPr sz="1350" b="1">
-                <a:solidFill>
-                  <a:srgbClr val="FFFFFF"/>
+              <a:rPr sz="1125" b="1">
+                <a:solidFill>
+                  <a:srgbClr val="2C6E73"/>
                 </a:solidFill>
                 <a:latin typeface="Arial"/>
                 <a:ea typeface="Arial"/>
@@ -8498,19 +8502,19 @@
           <p:cNvPr id="16" name="">
             <a:extLst xmlns:a="http://schemas.openxmlformats.org/drawingml/2006/main">
               <a:ext uri="{FF2B5EF4-FFF2-40B4-BE49-F238E27FC236}">
-                <a16:creationId xmlns:a16="http://schemas.microsoft.com/office/drawing/2014/main" id="{27F8DE74-1BBA-4E52-81EB-343B7445107B}"/>
-              </a:ext>
-            </a:extLst>
-          </p:cNvPr>
-          <p:cNvSpPr>
-            <a:spLocks xmlns:a="http://schemas.openxmlformats.org/drawingml/2006/main" noGrp="1"/>
-          </p:cNvSpPr>
-          <p:nvPr/>
-        </p:nvSpPr>
-        <p:spPr>
-          <a:xfrm xmlns:a="http://schemas.openxmlformats.org/drawingml/2006/main">
-            <a:off x="1714500" y="2924175"/>
-            <a:ext cx="9429750" cy="609600"/>
+                <a16:creationId xmlns:a16="http://schemas.microsoft.com/office/drawing/2014/main" id="{5475C2F3-E487-4AAA-8174-D750B217B21F}"/>
+              </a:ext>
+            </a:extLst>
+          </p:cNvPr>
+          <p:cNvSpPr>
+            <a:spLocks xmlns:a="http://schemas.openxmlformats.org/drawingml/2006/main" noGrp="1"/>
+          </p:cNvSpPr>
+          <p:nvPr/>
+        </p:nvSpPr>
+        <p:spPr>
+          <a:xfrm xmlns:a="http://schemas.openxmlformats.org/drawingml/2006/main">
+            <a:off x="1714500" y="2990850"/>
+            <a:ext cx="9525000" cy="809625"/>
           </a:xfrm>
           <a:prstGeom xmlns:a="http://schemas.openxmlformats.org/drawingml/2006/main" prst="rect">
             <a:avLst/>
@@ -8527,7 +8531,7 @@
           <a:lstStyle xmlns:a="http://schemas.openxmlformats.org/drawingml/2006/main"/>
           <a:p xmlns:a="http://schemas.openxmlformats.org/drawingml/2006/main">
             <a:pPr algn="l">
-              <a:defRPr sz="1500" b="0">
+              <a:defRPr sz="1725" b="0">
                 <a:solidFill>
                   <a:srgbClr val="17253A"/>
                 </a:solidFill>
@@ -8537,7 +8541,7 @@
               </a:defRPr>
             </a:pPr>
             <a:r>
-              <a:rPr sz="1500" b="0">
+              <a:rPr sz="1725" b="0">
                 <a:solidFill>
                   <a:srgbClr val="17253A"/>
                 </a:solidFill>
@@ -8545,7 +8549,7 @@
                 <a:ea typeface="Arial"/>
                 <a:cs typeface="Arial"/>
               </a:rPr>
-              <a:t>Set up the method: Keep place values or denominators aligned and record each stage.</a:t>
+              <a:t>Divisor becomes 10 times larger: 35 → 350</a:t>
             </a:r>
           </a:p>
         </p:txBody>
@@ -8555,28 +8559,30 @@
           <p:cNvPr id="17" name="">
             <a:extLst xmlns:a="http://schemas.openxmlformats.org/drawingml/2006/main">
               <a:ext uri="{FF2B5EF4-FFF2-40B4-BE49-F238E27FC236}">
-                <a16:creationId xmlns:a16="http://schemas.microsoft.com/office/drawing/2014/main" id="{2069A279-348F-4C68-88C1-68618FF0CA33}"/>
-              </a:ext>
-            </a:extLst>
-          </p:cNvPr>
-          <p:cNvSpPr>
-            <a:spLocks xmlns:a="http://schemas.openxmlformats.org/drawingml/2006/main" noGrp="1"/>
-          </p:cNvSpPr>
-          <p:nvPr/>
-        </p:nvSpPr>
-        <p:spPr>
-          <a:xfrm xmlns:a="http://schemas.openxmlformats.org/drawingml/2006/main">
-            <a:off x="1000125" y="3733800"/>
-            <a:ext cx="476250" cy="476250"/>
-          </a:xfrm>
-          <a:prstGeom xmlns:a="http://schemas.openxmlformats.org/drawingml/2006/main" prst="ellipse">
+                <a16:creationId xmlns:a16="http://schemas.microsoft.com/office/drawing/2014/main" id="{C8BABADF-9D1E-408B-ABC9-2950F282507F}"/>
+              </a:ext>
+            </a:extLst>
+          </p:cNvPr>
+          <p:cNvSpPr>
+            <a:spLocks xmlns:a="http://schemas.openxmlformats.org/drawingml/2006/main" noGrp="1"/>
+          </p:cNvSpPr>
+          <p:nvPr/>
+        </p:nvSpPr>
+        <p:spPr>
+          <a:xfrm xmlns:a="http://schemas.openxmlformats.org/drawingml/2006/main">
+            <a:off x="1714500" y="3819525"/>
+            <a:ext cx="9334500" cy="9525"/>
+          </a:xfrm>
+          <a:prstGeom xmlns:a="http://schemas.openxmlformats.org/drawingml/2006/main" prst="rect">
             <a:avLst/>
           </a:prstGeom>
           <a:solidFill xmlns:a="http://schemas.openxmlformats.org/drawingml/2006/main">
-            <a:srgbClr val="2C6E73"/>
+            <a:srgbClr val="D9E0E6"/>
           </a:solidFill>
           <a:ln xmlns:a="http://schemas.openxmlformats.org/drawingml/2006/main" w="0">
-            <a:noFill/>
+            <a:solidFill>
+              <a:srgbClr val="D9E0E6"/>
+            </a:solidFill>
           </a:ln>
         </p:spPr>
       </p:sp>
@@ -8585,19 +8591,19 @@
           <p:cNvPr id="18" name="">
             <a:extLst xmlns:a="http://schemas.openxmlformats.org/drawingml/2006/main">
               <a:ext uri="{FF2B5EF4-FFF2-40B4-BE49-F238E27FC236}">
-                <a16:creationId xmlns:a16="http://schemas.microsoft.com/office/drawing/2014/main" id="{E85DBE4D-F303-4679-B361-DA31A397A030}"/>
-              </a:ext>
-            </a:extLst>
-          </p:cNvPr>
-          <p:cNvSpPr>
-            <a:spLocks xmlns:a="http://schemas.openxmlformats.org/drawingml/2006/main" noGrp="1"/>
-          </p:cNvSpPr>
-          <p:nvPr/>
-        </p:nvSpPr>
-        <p:spPr>
-          <a:xfrm xmlns:a="http://schemas.openxmlformats.org/drawingml/2006/main">
-            <a:off x="1000125" y="3762375"/>
-            <a:ext cx="476250" cy="419100"/>
+                <a16:creationId xmlns:a16="http://schemas.microsoft.com/office/drawing/2014/main" id="{B59A7019-E0E6-442F-BC6C-95CE167FE309}"/>
+              </a:ext>
+            </a:extLst>
+          </p:cNvPr>
+          <p:cNvSpPr>
+            <a:spLocks xmlns:a="http://schemas.openxmlformats.org/drawingml/2006/main" noGrp="1"/>
+          </p:cNvSpPr>
+          <p:nvPr/>
+        </p:nvSpPr>
+        <p:spPr>
+          <a:xfrm xmlns:a="http://schemas.openxmlformats.org/drawingml/2006/main">
+            <a:off x="1162050" y="3952875"/>
+            <a:ext cx="400050" cy="400050"/>
           </a:xfrm>
           <a:prstGeom xmlns:a="http://schemas.openxmlformats.org/drawingml/2006/main" prst="rect">
             <a:avLst/>
@@ -8614,9 +8620,9 @@
           <a:lstStyle xmlns:a="http://schemas.openxmlformats.org/drawingml/2006/main"/>
           <a:p xmlns:a="http://schemas.openxmlformats.org/drawingml/2006/main">
             <a:pPr algn="ctr">
-              <a:defRPr sz="1350" b="1">
-                <a:solidFill>
-                  <a:srgbClr val="FFFFFF"/>
+              <a:defRPr sz="1125" b="1">
+                <a:solidFill>
+                  <a:srgbClr val="2C6E73"/>
                 </a:solidFill>
                 <a:latin typeface="Arial"/>
                 <a:ea typeface="Arial"/>
@@ -8624,9 +8630,9 @@
               </a:defRPr>
             </a:pPr>
             <a:r>
-              <a:rPr sz="1350" b="1">
-                <a:solidFill>
-                  <a:srgbClr val="FFFFFF"/>
+              <a:rPr sz="1125" b="1">
+                <a:solidFill>
+                  <a:srgbClr val="2C6E73"/>
                 </a:solidFill>
                 <a:latin typeface="Arial"/>
                 <a:ea typeface="Arial"/>
@@ -8642,19 +8648,19 @@
           <p:cNvPr id="19" name="">
             <a:extLst xmlns:a="http://schemas.openxmlformats.org/drawingml/2006/main">
               <a:ext uri="{FF2B5EF4-FFF2-40B4-BE49-F238E27FC236}">
-                <a16:creationId xmlns:a16="http://schemas.microsoft.com/office/drawing/2014/main" id="{11D21D94-A1E4-49C7-95F9-69F697443305}"/>
-              </a:ext>
-            </a:extLst>
-          </p:cNvPr>
-          <p:cNvSpPr>
-            <a:spLocks xmlns:a="http://schemas.openxmlformats.org/drawingml/2006/main" noGrp="1"/>
-          </p:cNvSpPr>
-          <p:nvPr/>
-        </p:nvSpPr>
-        <p:spPr>
-          <a:xfrm xmlns:a="http://schemas.openxmlformats.org/drawingml/2006/main">
-            <a:off x="1714500" y="3667125"/>
-            <a:ext cx="9429750" cy="609600"/>
+                <a16:creationId xmlns:a16="http://schemas.microsoft.com/office/drawing/2014/main" id="{D1EC7DF4-6FDB-423D-9A9A-4F01269E16F2}"/>
+              </a:ext>
+            </a:extLst>
+          </p:cNvPr>
+          <p:cNvSpPr>
+            <a:spLocks xmlns:a="http://schemas.openxmlformats.org/drawingml/2006/main" noGrp="1"/>
+          </p:cNvSpPr>
+          <p:nvPr/>
+        </p:nvSpPr>
+        <p:spPr>
+          <a:xfrm xmlns:a="http://schemas.openxmlformats.org/drawingml/2006/main">
+            <a:off x="1714500" y="3867150"/>
+            <a:ext cx="9525000" cy="809625"/>
           </a:xfrm>
           <a:prstGeom xmlns:a="http://schemas.openxmlformats.org/drawingml/2006/main" prst="rect">
             <a:avLst/>
@@ -8671,7 +8677,7 @@
           <a:lstStyle xmlns:a="http://schemas.openxmlformats.org/drawingml/2006/main"/>
           <a:p xmlns:a="http://schemas.openxmlformats.org/drawingml/2006/main">
             <a:pPr algn="l">
-              <a:defRPr sz="1500" b="0">
+              <a:defRPr sz="1725" b="0">
                 <a:solidFill>
                   <a:srgbClr val="17253A"/>
                 </a:solidFill>
@@ -8681,7 +8687,7 @@
               </a:defRPr>
             </a:pPr>
             <a:r>
-              <a:rPr sz="1500" b="0">
+              <a:rPr sz="1725" b="0">
                 <a:solidFill>
                   <a:srgbClr val="17253A"/>
                 </a:solidFill>
@@ -8689,7 +8695,7 @@
                 <a:ea typeface="Arial"/>
                 <a:cs typeface="Arial"/>
               </a:rPr>
-              <a:t>Complete the calculation: 13.5.</a:t>
+              <a:t>Quotient becomes 10 times smaller: 135 → 13.5</a:t>
             </a:r>
           </a:p>
         </p:txBody>
@@ -8699,28 +8705,30 @@
           <p:cNvPr id="20" name="">
             <a:extLst xmlns:a="http://schemas.openxmlformats.org/drawingml/2006/main">
               <a:ext uri="{FF2B5EF4-FFF2-40B4-BE49-F238E27FC236}">
-                <a16:creationId xmlns:a16="http://schemas.microsoft.com/office/drawing/2014/main" id="{6EBE7F58-3FDB-4211-A8DE-F302D077229F}"/>
-              </a:ext>
-            </a:extLst>
-          </p:cNvPr>
-          <p:cNvSpPr>
-            <a:spLocks xmlns:a="http://schemas.openxmlformats.org/drawingml/2006/main" noGrp="1"/>
-          </p:cNvSpPr>
-          <p:nvPr/>
-        </p:nvSpPr>
-        <p:spPr>
-          <a:xfrm xmlns:a="http://schemas.openxmlformats.org/drawingml/2006/main">
-            <a:off x="1000125" y="4476750"/>
-            <a:ext cx="476250" cy="476250"/>
-          </a:xfrm>
-          <a:prstGeom xmlns:a="http://schemas.openxmlformats.org/drawingml/2006/main" prst="ellipse">
+                <a16:creationId xmlns:a16="http://schemas.microsoft.com/office/drawing/2014/main" id="{974587EE-7482-403E-A208-332BABB62B41}"/>
+              </a:ext>
+            </a:extLst>
+          </p:cNvPr>
+          <p:cNvSpPr>
+            <a:spLocks xmlns:a="http://schemas.openxmlformats.org/drawingml/2006/main" noGrp="1"/>
+          </p:cNvSpPr>
+          <p:nvPr/>
+        </p:nvSpPr>
+        <p:spPr>
+          <a:xfrm xmlns:a="http://schemas.openxmlformats.org/drawingml/2006/main">
+            <a:off x="1714500" y="4695825"/>
+            <a:ext cx="9334500" cy="9525"/>
+          </a:xfrm>
+          <a:prstGeom xmlns:a="http://schemas.openxmlformats.org/drawingml/2006/main" prst="rect">
             <a:avLst/>
           </a:prstGeom>
           <a:solidFill xmlns:a="http://schemas.openxmlformats.org/drawingml/2006/main">
-            <a:srgbClr val="2C6E73"/>
+            <a:srgbClr val="D9E0E6"/>
           </a:solidFill>
           <a:ln xmlns:a="http://schemas.openxmlformats.org/drawingml/2006/main" w="0">
-            <a:noFill/>
+            <a:solidFill>
+              <a:srgbClr val="D9E0E6"/>
+            </a:solidFill>
           </a:ln>
         </p:spPr>
       </p:sp>
@@ -8729,19 +8737,19 @@
           <p:cNvPr id="21" name="">
             <a:extLst xmlns:a="http://schemas.openxmlformats.org/drawingml/2006/main">
               <a:ext uri="{FF2B5EF4-FFF2-40B4-BE49-F238E27FC236}">
-                <a16:creationId xmlns:a16="http://schemas.microsoft.com/office/drawing/2014/main" id="{E7E02E4B-C91D-464A-BDFE-5BACAE3FB7D6}"/>
-              </a:ext>
-            </a:extLst>
-          </p:cNvPr>
-          <p:cNvSpPr>
-            <a:spLocks xmlns:a="http://schemas.openxmlformats.org/drawingml/2006/main" noGrp="1"/>
-          </p:cNvSpPr>
-          <p:nvPr/>
-        </p:nvSpPr>
-        <p:spPr>
-          <a:xfrm xmlns:a="http://schemas.openxmlformats.org/drawingml/2006/main">
-            <a:off x="1000125" y="4505325"/>
-            <a:ext cx="476250" cy="419100"/>
+                <a16:creationId xmlns:a16="http://schemas.microsoft.com/office/drawing/2014/main" id="{F9910DA3-16A4-47FF-AF78-F78628CD4A77}"/>
+              </a:ext>
+            </a:extLst>
+          </p:cNvPr>
+          <p:cNvSpPr>
+            <a:spLocks xmlns:a="http://schemas.openxmlformats.org/drawingml/2006/main" noGrp="1"/>
+          </p:cNvSpPr>
+          <p:nvPr/>
+        </p:nvSpPr>
+        <p:spPr>
+          <a:xfrm xmlns:a="http://schemas.openxmlformats.org/drawingml/2006/main">
+            <a:off x="1162050" y="4829175"/>
+            <a:ext cx="400050" cy="400050"/>
           </a:xfrm>
           <a:prstGeom xmlns:a="http://schemas.openxmlformats.org/drawingml/2006/main" prst="rect">
             <a:avLst/>
@@ -8758,9 +8766,9 @@
           <a:lstStyle xmlns:a="http://schemas.openxmlformats.org/drawingml/2006/main"/>
           <a:p xmlns:a="http://schemas.openxmlformats.org/drawingml/2006/main">
             <a:pPr algn="ctr">
-              <a:defRPr sz="1350" b="1">
-                <a:solidFill>
-                  <a:srgbClr val="FFFFFF"/>
+              <a:defRPr sz="1125" b="1">
+                <a:solidFill>
+                  <a:srgbClr val="2F785D"/>
                 </a:solidFill>
                 <a:latin typeface="Arial"/>
                 <a:ea typeface="Arial"/>
@@ -8768,9 +8776,9 @@
               </a:defRPr>
             </a:pPr>
             <a:r>
-              <a:rPr sz="1350" b="1">
-                <a:solidFill>
-                  <a:srgbClr val="FFFFFF"/>
+              <a:rPr sz="1125" b="1">
+                <a:solidFill>
+                  <a:srgbClr val="2F785D"/>
                 </a:solidFill>
                 <a:latin typeface="Arial"/>
                 <a:ea typeface="Arial"/>
@@ -8786,19 +8794,19 @@
           <p:cNvPr id="22" name="">
             <a:extLst xmlns:a="http://schemas.openxmlformats.org/drawingml/2006/main">
               <a:ext uri="{FF2B5EF4-FFF2-40B4-BE49-F238E27FC236}">
-                <a16:creationId xmlns:a16="http://schemas.microsoft.com/office/drawing/2014/main" id="{4D97BA55-5B2B-4BE2-BE41-9D599F87EA0E}"/>
-              </a:ext>
-            </a:extLst>
-          </p:cNvPr>
-          <p:cNvSpPr>
-            <a:spLocks xmlns:a="http://schemas.openxmlformats.org/drawingml/2006/main" noGrp="1"/>
-          </p:cNvSpPr>
-          <p:nvPr/>
-        </p:nvSpPr>
-        <p:spPr>
-          <a:xfrm xmlns:a="http://schemas.openxmlformats.org/drawingml/2006/main">
-            <a:off x="1714500" y="4410075"/>
-            <a:ext cx="9429750" cy="609600"/>
+                <a16:creationId xmlns:a16="http://schemas.microsoft.com/office/drawing/2014/main" id="{05353A98-21CC-49FF-8B50-79950B21F71C}"/>
+              </a:ext>
+            </a:extLst>
+          </p:cNvPr>
+          <p:cNvSpPr>
+            <a:spLocks xmlns:a="http://schemas.openxmlformats.org/drawingml/2006/main" noGrp="1"/>
+          </p:cNvSpPr>
+          <p:nvPr/>
+        </p:nvSpPr>
+        <p:spPr>
+          <a:xfrm xmlns:a="http://schemas.openxmlformats.org/drawingml/2006/main">
+            <a:off x="1714500" y="4743450"/>
+            <a:ext cx="9525000" cy="809625"/>
           </a:xfrm>
           <a:prstGeom xmlns:a="http://schemas.openxmlformats.org/drawingml/2006/main" prst="rect">
             <a:avLst/>
@@ -8815,7 +8823,7 @@
           <a:lstStyle xmlns:a="http://schemas.openxmlformats.org/drawingml/2006/main"/>
           <a:p xmlns:a="http://schemas.openxmlformats.org/drawingml/2006/main">
             <a:pPr algn="l">
-              <a:defRPr sz="1500" b="1">
+              <a:defRPr sz="1725" b="1">
                 <a:solidFill>
                   <a:srgbClr val="2F785D"/>
                 </a:solidFill>
@@ -8825,7 +8833,7 @@
               </a:defRPr>
             </a:pPr>
             <a:r>
-              <a:rPr sz="1500" b="1">
+              <a:rPr sz="1725" b="1">
                 <a:solidFill>
                   <a:srgbClr val="2F785D"/>
                 </a:solidFill>
@@ -8833,7 +8841,7 @@
                 <a:ea typeface="Arial"/>
                 <a:cs typeface="Arial"/>
               </a:rPr>
-              <a:t>Check the result: Simplify where needed and check the result for size and reasonableness.</a:t>
+              <a:t>4,725 ÷ 350 = 13.5</a:t>
             </a:r>
           </a:p>
         </p:txBody>
@@ -8841,7 +8849,7 @@
     </p:spTree>
     <p:extLst>
       <p:ext uri="{BB962C8B-B14F-4D97-AF65-F5344CB8AC3E}">
-        <p14:creationId xmlns:p14="http://schemas.microsoft.com/office/powerpoint/2010/main" val="608375613"/>
+        <p14:creationId xmlns:p14="http://schemas.microsoft.com/office/powerpoint/2010/main" val="897729172"/>
       </p:ext>
     </p:extLst>
   </p:cSld>
@@ -9134,7 +9142,7 @@
           <p:cNvPr id="15" name="">
             <a:extLst xmlns:a="http://schemas.openxmlformats.org/drawingml/2006/main">
               <a:ext uri="{FF2B5EF4-FFF2-40B4-BE49-F238E27FC236}">
-                <a16:creationId xmlns:a16="http://schemas.microsoft.com/office/drawing/2014/main" id="{5B85D647-B356-4B59-883D-22EA2A8FD3A5}"/>
+                <a16:creationId xmlns:a16="http://schemas.microsoft.com/office/drawing/2014/main" id="{E44F2D31-E5F5-44A3-85FF-93CE49980B22}"/>
               </a:ext>
             </a:extLst>
           </p:cNvPr>
@@ -9166,7 +9174,7 @@
           <p:cNvPr id="2" name="">
             <a:extLst xmlns:a="http://schemas.openxmlformats.org/drawingml/2006/main">
               <a:ext uri="{FF2B5EF4-FFF2-40B4-BE49-F238E27FC236}">
-                <a16:creationId xmlns:a16="http://schemas.microsoft.com/office/drawing/2014/main" id="{20A348E8-EFDD-404B-A57E-F13D2BB465EB}"/>
+                <a16:creationId xmlns:a16="http://schemas.microsoft.com/office/drawing/2014/main" id="{EC25CF63-34EE-4A5D-BC72-85E87BFB5A25}"/>
               </a:ext>
             </a:extLst>
           </p:cNvPr>
@@ -9223,7 +9231,7 @@
           <p:cNvPr id="3" name="">
             <a:extLst xmlns:a="http://schemas.openxmlformats.org/drawingml/2006/main">
               <a:ext uri="{FF2B5EF4-FFF2-40B4-BE49-F238E27FC236}">
-                <a16:creationId xmlns:a16="http://schemas.microsoft.com/office/drawing/2014/main" id="{48CEA795-6D3B-4B6B-8CCE-4FDD5352F004}"/>
+                <a16:creationId xmlns:a16="http://schemas.microsoft.com/office/drawing/2014/main" id="{96CF6C4D-14A7-4221-8182-F015E1A262D6}"/>
               </a:ext>
             </a:extLst>
           </p:cNvPr>
@@ -9255,7 +9263,7 @@
           <p:cNvPr id="4" name="">
             <a:extLst xmlns:a="http://schemas.openxmlformats.org/drawingml/2006/main">
               <a:ext uri="{FF2B5EF4-FFF2-40B4-BE49-F238E27FC236}">
-                <a16:creationId xmlns:a16="http://schemas.microsoft.com/office/drawing/2014/main" id="{D8DE2265-D2E6-4F2F-BED7-547D47303700}"/>
+                <a16:creationId xmlns:a16="http://schemas.microsoft.com/office/drawing/2014/main" id="{47F67259-9888-4284-98BB-689BD4055827}"/>
               </a:ext>
             </a:extLst>
           </p:cNvPr>
@@ -9312,7 +9320,7 @@
           <p:cNvPr id="5" name="">
             <a:extLst xmlns:a="http://schemas.openxmlformats.org/drawingml/2006/main">
               <a:ext uri="{FF2B5EF4-FFF2-40B4-BE49-F238E27FC236}">
-                <a16:creationId xmlns:a16="http://schemas.microsoft.com/office/drawing/2014/main" id="{420D36F3-78DD-4D89-9365-3EF1BF071C29}"/>
+                <a16:creationId xmlns:a16="http://schemas.microsoft.com/office/drawing/2014/main" id="{6F87C75A-083D-42CB-9431-F0B70CBEA15D}"/>
               </a:ext>
             </a:extLst>
           </p:cNvPr>
@@ -9369,7 +9377,7 @@
           <p:cNvPr id="6" name="">
             <a:extLst xmlns:a="http://schemas.openxmlformats.org/drawingml/2006/main">
               <a:ext uri="{FF2B5EF4-FFF2-40B4-BE49-F238E27FC236}">
-                <a16:creationId xmlns:a16="http://schemas.microsoft.com/office/drawing/2014/main" id="{5CB50827-1C72-44A6-B62A-210A316008AD}"/>
+                <a16:creationId xmlns:a16="http://schemas.microsoft.com/office/drawing/2014/main" id="{B1FDE422-E6D8-478A-976E-343982B82D90}"/>
               </a:ext>
             </a:extLst>
           </p:cNvPr>
@@ -9426,7 +9434,7 @@
           <p:cNvPr id="7" name="">
             <a:extLst xmlns:a="http://schemas.openxmlformats.org/drawingml/2006/main">
               <a:ext uri="{FF2B5EF4-FFF2-40B4-BE49-F238E27FC236}">
-                <a16:creationId xmlns:a16="http://schemas.microsoft.com/office/drawing/2014/main" id="{85A67767-FE93-4395-A272-EC2B236F0FD0}"/>
+                <a16:creationId xmlns:a16="http://schemas.microsoft.com/office/drawing/2014/main" id="{B73E1C6C-2415-4924-88FF-4FB3B31B1608}"/>
               </a:ext>
             </a:extLst>
           </p:cNvPr>
@@ -9458,7 +9466,7 @@
           <p:cNvPr id="8" name="">
             <a:extLst xmlns:a="http://schemas.openxmlformats.org/drawingml/2006/main">
               <a:ext uri="{FF2B5EF4-FFF2-40B4-BE49-F238E27FC236}">
-                <a16:creationId xmlns:a16="http://schemas.microsoft.com/office/drawing/2014/main" id="{8C28BFBA-8DEF-493E-8F4F-E50C7BD1D246}"/>
+                <a16:creationId xmlns:a16="http://schemas.microsoft.com/office/drawing/2014/main" id="{A1017660-E006-47D4-9A51-EAC45A1E348C}"/>
               </a:ext>
             </a:extLst>
           </p:cNvPr>
@@ -9515,7 +9523,7 @@
           <p:cNvPr id="9" name="">
             <a:extLst xmlns:a="http://schemas.openxmlformats.org/drawingml/2006/main">
               <a:ext uri="{FF2B5EF4-FFF2-40B4-BE49-F238E27FC236}">
-                <a16:creationId xmlns:a16="http://schemas.microsoft.com/office/drawing/2014/main" id="{2A88B284-C90A-48EF-9BBC-F44BE2D06426}"/>
+                <a16:creationId xmlns:a16="http://schemas.microsoft.com/office/drawing/2014/main" id="{FA534CA3-C54D-48F7-9B4C-9F267D787FE9}"/>
               </a:ext>
             </a:extLst>
           </p:cNvPr>
@@ -9572,7 +9580,7 @@
           <p:cNvPr id="10" name="">
             <a:extLst xmlns:a="http://schemas.openxmlformats.org/drawingml/2006/main">
               <a:ext uri="{FF2B5EF4-FFF2-40B4-BE49-F238E27FC236}">
-                <a16:creationId xmlns:a16="http://schemas.microsoft.com/office/drawing/2014/main" id="{58455184-5623-4994-AC7C-15D28A96C174}"/>
+                <a16:creationId xmlns:a16="http://schemas.microsoft.com/office/drawing/2014/main" id="{08A43D79-E8B2-455F-BE94-DF7A3D4A1958}"/>
               </a:ext>
             </a:extLst>
           </p:cNvPr>
@@ -9629,7 +9637,7 @@
           <p:cNvPr id="11" name="">
             <a:extLst xmlns:a="http://schemas.openxmlformats.org/drawingml/2006/main">
               <a:ext uri="{FF2B5EF4-FFF2-40B4-BE49-F238E27FC236}">
-                <a16:creationId xmlns:a16="http://schemas.microsoft.com/office/drawing/2014/main" id="{FCCE3F83-EE5B-4CC7-8A86-9F216CA89B67}"/>
+                <a16:creationId xmlns:a16="http://schemas.microsoft.com/office/drawing/2014/main" id="{2CFA85FC-9F8F-4E7F-B846-03BEF726FCD4}"/>
               </a:ext>
             </a:extLst>
           </p:cNvPr>
@@ -9686,7 +9694,7 @@
           <p:cNvPr id="12" name="">
             <a:extLst xmlns:a="http://schemas.openxmlformats.org/drawingml/2006/main">
               <a:ext uri="{FF2B5EF4-FFF2-40B4-BE49-F238E27FC236}">
-                <a16:creationId xmlns:a16="http://schemas.microsoft.com/office/drawing/2014/main" id="{E32E6CA3-7549-419E-AA51-0C7FD86D3EC5}"/>
+                <a16:creationId xmlns:a16="http://schemas.microsoft.com/office/drawing/2014/main" id="{90B612EF-59AD-4678-A816-D4A2E3067748}"/>
               </a:ext>
             </a:extLst>
           </p:cNvPr>
@@ -9718,7 +9726,7 @@
           <p:cNvPr id="13" name="">
             <a:extLst xmlns:a="http://schemas.openxmlformats.org/drawingml/2006/main">
               <a:ext uri="{FF2B5EF4-FFF2-40B4-BE49-F238E27FC236}">
-                <a16:creationId xmlns:a16="http://schemas.microsoft.com/office/drawing/2014/main" id="{F6AF48CC-1187-42FD-B5E2-1E2D1894995A}"/>
+                <a16:creationId xmlns:a16="http://schemas.microsoft.com/office/drawing/2014/main" id="{DB50F9E0-F385-42B6-8830-AA1FD3D2BF22}"/>
               </a:ext>
             </a:extLst>
           </p:cNvPr>
@@ -9775,7 +9783,7 @@
           <p:cNvPr id="14" name="">
             <a:extLst xmlns:a="http://schemas.openxmlformats.org/drawingml/2006/main">
               <a:ext uri="{FF2B5EF4-FFF2-40B4-BE49-F238E27FC236}">
-                <a16:creationId xmlns:a16="http://schemas.microsoft.com/office/drawing/2014/main" id="{C14AE0D4-7CB6-4F17-9CDE-A9C6DFD200FA}"/>
+                <a16:creationId xmlns:a16="http://schemas.microsoft.com/office/drawing/2014/main" id="{BAD15AC9-254C-4547-B73B-0B78AFCC457D}"/>
               </a:ext>
             </a:extLst>
           </p:cNvPr>
@@ -9830,7 +9838,7 @@
     </p:spTree>
     <p:extLst>
       <p:ext uri="{BB962C8B-B14F-4D97-AF65-F5344CB8AC3E}">
-        <p14:creationId xmlns:p14="http://schemas.microsoft.com/office/powerpoint/2010/main" val="624596147"/>
+        <p14:creationId xmlns:p14="http://schemas.microsoft.com/office/powerpoint/2010/main" val="1887260944"/>
       </p:ext>
     </p:extLst>
   </p:cSld>
@@ -10031,7 +10039,7 @@
           <p:cNvPr id="16" name="">
             <a:extLst xmlns:a="http://schemas.openxmlformats.org/drawingml/2006/main">
               <a:ext uri="{FF2B5EF4-FFF2-40B4-BE49-F238E27FC236}">
-                <a16:creationId xmlns:a16="http://schemas.microsoft.com/office/drawing/2014/main" id="{1AA896E5-CC7C-4B43-A8A4-0E11394C395A}"/>
+                <a16:creationId xmlns:a16="http://schemas.microsoft.com/office/drawing/2014/main" id="{B250ADDC-49D0-426B-BD52-EDD3F5420876}"/>
               </a:ext>
             </a:extLst>
           </p:cNvPr>
@@ -10063,7 +10071,7 @@
           <p:cNvPr id="2" name="">
             <a:extLst xmlns:a="http://schemas.openxmlformats.org/drawingml/2006/main">
               <a:ext uri="{FF2B5EF4-FFF2-40B4-BE49-F238E27FC236}">
-                <a16:creationId xmlns:a16="http://schemas.microsoft.com/office/drawing/2014/main" id="{ADDAE59B-34D0-4468-B7AD-FED9D5106E8C}"/>
+                <a16:creationId xmlns:a16="http://schemas.microsoft.com/office/drawing/2014/main" id="{4E93E196-5144-4E7D-B273-0DB22D80AB1E}"/>
               </a:ext>
             </a:extLst>
           </p:cNvPr>
@@ -10120,7 +10128,7 @@
           <p:cNvPr id="3" name="">
             <a:extLst xmlns:a="http://schemas.openxmlformats.org/drawingml/2006/main">
               <a:ext uri="{FF2B5EF4-FFF2-40B4-BE49-F238E27FC236}">
-                <a16:creationId xmlns:a16="http://schemas.microsoft.com/office/drawing/2014/main" id="{FC609EB3-9D61-42F7-8DA7-0521783EF533}"/>
+                <a16:creationId xmlns:a16="http://schemas.microsoft.com/office/drawing/2014/main" id="{F23FABD8-E608-4B1C-A067-EC5FC79EF87E}"/>
               </a:ext>
             </a:extLst>
           </p:cNvPr>
@@ -10152,7 +10160,7 @@
           <p:cNvPr id="4" name="">
             <a:extLst xmlns:a="http://schemas.openxmlformats.org/drawingml/2006/main">
               <a:ext uri="{FF2B5EF4-FFF2-40B4-BE49-F238E27FC236}">
-                <a16:creationId xmlns:a16="http://schemas.microsoft.com/office/drawing/2014/main" id="{E8F88FCD-615F-412D-AC89-02AEBFA06356}"/>
+                <a16:creationId xmlns:a16="http://schemas.microsoft.com/office/drawing/2014/main" id="{5385436C-76D4-4409-8536-149ED991CAA2}"/>
               </a:ext>
             </a:extLst>
           </p:cNvPr>
@@ -10209,7 +10217,7 @@
           <p:cNvPr id="5" name="">
             <a:extLst xmlns:a="http://schemas.openxmlformats.org/drawingml/2006/main">
               <a:ext uri="{FF2B5EF4-FFF2-40B4-BE49-F238E27FC236}">
-                <a16:creationId xmlns:a16="http://schemas.microsoft.com/office/drawing/2014/main" id="{1EB81043-67FB-47DF-AFAF-0041318130A4}"/>
+                <a16:creationId xmlns:a16="http://schemas.microsoft.com/office/drawing/2014/main" id="{F787513F-3086-42FF-B328-58D88F4304E2}"/>
               </a:ext>
             </a:extLst>
           </p:cNvPr>
@@ -10266,7 +10274,7 @@
           <p:cNvPr id="6" name="">
             <a:extLst xmlns:a="http://schemas.openxmlformats.org/drawingml/2006/main">
               <a:ext uri="{FF2B5EF4-FFF2-40B4-BE49-F238E27FC236}">
-                <a16:creationId xmlns:a16="http://schemas.microsoft.com/office/drawing/2014/main" id="{DC5BB70A-AD3B-46E5-8911-7F044D8102C6}"/>
+                <a16:creationId xmlns:a16="http://schemas.microsoft.com/office/drawing/2014/main" id="{93A79D6F-7B17-4015-826C-1ED1494F4A8E}"/>
               </a:ext>
             </a:extLst>
           </p:cNvPr>
@@ -10323,7 +10331,7 @@
           <p:cNvPr id="7" name="">
             <a:extLst xmlns:a="http://schemas.openxmlformats.org/drawingml/2006/main">
               <a:ext uri="{FF2B5EF4-FFF2-40B4-BE49-F238E27FC236}">
-                <a16:creationId xmlns:a16="http://schemas.microsoft.com/office/drawing/2014/main" id="{53896739-8638-4DBC-A85A-C72FA0E1E6F1}"/>
+                <a16:creationId xmlns:a16="http://schemas.microsoft.com/office/drawing/2014/main" id="{0C2B3845-DB59-4A96-B149-AA1761CDF997}"/>
               </a:ext>
             </a:extLst>
           </p:cNvPr>
@@ -10355,7 +10363,7 @@
           <p:cNvPr id="8" name="">
             <a:extLst xmlns:a="http://schemas.openxmlformats.org/drawingml/2006/main">
               <a:ext uri="{FF2B5EF4-FFF2-40B4-BE49-F238E27FC236}">
-                <a16:creationId xmlns:a16="http://schemas.microsoft.com/office/drawing/2014/main" id="{E48D6AF9-BA1C-4B84-A45A-991FF81EA836}"/>
+                <a16:creationId xmlns:a16="http://schemas.microsoft.com/office/drawing/2014/main" id="{05AE5804-98A2-451D-8A81-6FAAB7EF63FF}"/>
               </a:ext>
             </a:extLst>
           </p:cNvPr>
@@ -10412,7 +10420,7 @@
           <p:cNvPr id="9" name="">
             <a:extLst xmlns:a="http://schemas.openxmlformats.org/drawingml/2006/main">
               <a:ext uri="{FF2B5EF4-FFF2-40B4-BE49-F238E27FC236}">
-                <a16:creationId xmlns:a16="http://schemas.microsoft.com/office/drawing/2014/main" id="{947A8C03-397E-46A2-96D4-E33202CA0B11}"/>
+                <a16:creationId xmlns:a16="http://schemas.microsoft.com/office/drawing/2014/main" id="{945A1640-7AA0-4001-8BFC-F2B71AA5261F}"/>
               </a:ext>
             </a:extLst>
           </p:cNvPr>
@@ -10469,7 +10477,7 @@
           <p:cNvPr id="10" name="">
             <a:extLst xmlns:a="http://schemas.openxmlformats.org/drawingml/2006/main">
               <a:ext uri="{FF2B5EF4-FFF2-40B4-BE49-F238E27FC236}">
-                <a16:creationId xmlns:a16="http://schemas.microsoft.com/office/drawing/2014/main" id="{A20CF83F-92F8-43E9-B39E-03B9199C26BC}"/>
+                <a16:creationId xmlns:a16="http://schemas.microsoft.com/office/drawing/2014/main" id="{0D6BAF08-16BD-415B-8C01-AA232459EE17}"/>
               </a:ext>
             </a:extLst>
           </p:cNvPr>
@@ -10526,7 +10534,7 @@
           <p:cNvPr id="11" name="">
             <a:extLst xmlns:a="http://schemas.openxmlformats.org/drawingml/2006/main">
               <a:ext uri="{FF2B5EF4-FFF2-40B4-BE49-F238E27FC236}">
-                <a16:creationId xmlns:a16="http://schemas.microsoft.com/office/drawing/2014/main" id="{03BB0C08-B8B6-463E-8EFF-6264838E5845}"/>
+                <a16:creationId xmlns:a16="http://schemas.microsoft.com/office/drawing/2014/main" id="{D7C18CE0-B800-450C-B073-DA46875D0125}"/>
               </a:ext>
             </a:extLst>
           </p:cNvPr>
@@ -10583,7 +10591,7 @@
           <p:cNvPr id="12" name="">
             <a:extLst xmlns:a="http://schemas.openxmlformats.org/drawingml/2006/main">
               <a:ext uri="{FF2B5EF4-FFF2-40B4-BE49-F238E27FC236}">
-                <a16:creationId xmlns:a16="http://schemas.microsoft.com/office/drawing/2014/main" id="{AF1DB0A5-B6C8-4A86-955B-87723495D480}"/>
+                <a16:creationId xmlns:a16="http://schemas.microsoft.com/office/drawing/2014/main" id="{B07DE49C-683A-450A-9041-DFC268EBEC6B}"/>
               </a:ext>
             </a:extLst>
           </p:cNvPr>
@@ -10640,7 +10648,7 @@
           <p:cNvPr id="13" name="">
             <a:extLst xmlns:a="http://schemas.openxmlformats.org/drawingml/2006/main">
               <a:ext uri="{FF2B5EF4-FFF2-40B4-BE49-F238E27FC236}">
-                <a16:creationId xmlns:a16="http://schemas.microsoft.com/office/drawing/2014/main" id="{6A92ED88-B461-415A-85F3-ECA0BC6630DE}"/>
+                <a16:creationId xmlns:a16="http://schemas.microsoft.com/office/drawing/2014/main" id="{D2798888-3303-4FCA-823E-CA6B5F60AAC3}"/>
               </a:ext>
             </a:extLst>
           </p:cNvPr>
@@ -10697,7 +10705,7 @@
           <p:cNvPr id="14" name="">
             <a:extLst xmlns:a="http://schemas.openxmlformats.org/drawingml/2006/main">
               <a:ext uri="{FF2B5EF4-FFF2-40B4-BE49-F238E27FC236}">
-                <a16:creationId xmlns:a16="http://schemas.microsoft.com/office/drawing/2014/main" id="{D2A17838-BC07-4210-B51E-1035457A01B3}"/>
+                <a16:creationId xmlns:a16="http://schemas.microsoft.com/office/drawing/2014/main" id="{C1EE6896-C6EA-47BD-9002-4AB5E24ED083}"/>
               </a:ext>
             </a:extLst>
           </p:cNvPr>
@@ -10754,7 +10762,7 @@
           <p:cNvPr id="15" name="">
             <a:extLst xmlns:a="http://schemas.openxmlformats.org/drawingml/2006/main">
               <a:ext uri="{FF2B5EF4-FFF2-40B4-BE49-F238E27FC236}">
-                <a16:creationId xmlns:a16="http://schemas.microsoft.com/office/drawing/2014/main" id="{F174222C-05BF-4ABE-98A7-17B6C5BCB398}"/>
+                <a16:creationId xmlns:a16="http://schemas.microsoft.com/office/drawing/2014/main" id="{ABFE8E40-7C78-4122-8C64-0D3080B0F499}"/>
               </a:ext>
             </a:extLst>
           </p:cNvPr>
@@ -10809,7 +10817,7 @@
     </p:spTree>
     <p:extLst>
       <p:ext uri="{BB962C8B-B14F-4D97-AF65-F5344CB8AC3E}">
-        <p14:creationId xmlns:p14="http://schemas.microsoft.com/office/powerpoint/2010/main" val="1200932749"/>
+        <p14:creationId xmlns:p14="http://schemas.microsoft.com/office/powerpoint/2010/main" val="696955096"/>
       </p:ext>
     </p:extLst>
   </p:cSld>
@@ -10964,7 +10972,7 @@
           <p:cNvPr id="16" name="">
             <a:extLst xmlns:a="http://schemas.openxmlformats.org/drawingml/2006/main">
               <a:ext uri="{FF2B5EF4-FFF2-40B4-BE49-F238E27FC236}">
-                <a16:creationId xmlns:a16="http://schemas.microsoft.com/office/drawing/2014/main" id="{D5E9DE8E-BCE3-489B-B42A-C62E20B5AE41}"/>
+                <a16:creationId xmlns:a16="http://schemas.microsoft.com/office/drawing/2014/main" id="{46A44D4B-47A3-4797-BCE1-EFE5590D6191}"/>
               </a:ext>
             </a:extLst>
           </p:cNvPr>
@@ -10996,7 +11004,7 @@
           <p:cNvPr id="2" name="">
             <a:extLst xmlns:a="http://schemas.openxmlformats.org/drawingml/2006/main">
               <a:ext uri="{FF2B5EF4-FFF2-40B4-BE49-F238E27FC236}">
-                <a16:creationId xmlns:a16="http://schemas.microsoft.com/office/drawing/2014/main" id="{8613CCEF-1EA1-4265-AD53-CD5031C08DCD}"/>
+                <a16:creationId xmlns:a16="http://schemas.microsoft.com/office/drawing/2014/main" id="{42FC98F6-FC6B-4D89-BCF3-E5A4FDDCAEE7}"/>
               </a:ext>
             </a:extLst>
           </p:cNvPr>
@@ -11053,7 +11061,7 @@
           <p:cNvPr id="3" name="">
             <a:extLst xmlns:a="http://schemas.openxmlformats.org/drawingml/2006/main">
               <a:ext uri="{FF2B5EF4-FFF2-40B4-BE49-F238E27FC236}">
-                <a16:creationId xmlns:a16="http://schemas.microsoft.com/office/drawing/2014/main" id="{5C526EAA-D2B1-469F-8D4F-B8E8EAB268B8}"/>
+                <a16:creationId xmlns:a16="http://schemas.microsoft.com/office/drawing/2014/main" id="{31F4B11A-15A7-4324-AA79-4EDFC88A6097}"/>
               </a:ext>
             </a:extLst>
           </p:cNvPr>
@@ -11085,7 +11093,7 @@
           <p:cNvPr id="4" name="">
             <a:extLst xmlns:a="http://schemas.openxmlformats.org/drawingml/2006/main">
               <a:ext uri="{FF2B5EF4-FFF2-40B4-BE49-F238E27FC236}">
-                <a16:creationId xmlns:a16="http://schemas.microsoft.com/office/drawing/2014/main" id="{03B99B11-1189-4C1F-8198-089EB1DB139A}"/>
+                <a16:creationId xmlns:a16="http://schemas.microsoft.com/office/drawing/2014/main" id="{87800084-16AF-4768-B8B5-B412CC2B6ACF}"/>
               </a:ext>
             </a:extLst>
           </p:cNvPr>
@@ -11142,7 +11150,7 @@
           <p:cNvPr id="5" name="">
             <a:extLst xmlns:a="http://schemas.openxmlformats.org/drawingml/2006/main">
               <a:ext uri="{FF2B5EF4-FFF2-40B4-BE49-F238E27FC236}">
-                <a16:creationId xmlns:a16="http://schemas.microsoft.com/office/drawing/2014/main" id="{9B6D1CD3-DA41-4413-AF94-2A77AB05F490}"/>
+                <a16:creationId xmlns:a16="http://schemas.microsoft.com/office/drawing/2014/main" id="{5EF6711A-25A5-4A44-BEF6-A1436EF47D90}"/>
               </a:ext>
             </a:extLst>
           </p:cNvPr>
@@ -11199,7 +11207,7 @@
           <p:cNvPr id="6" name="">
             <a:extLst xmlns:a="http://schemas.openxmlformats.org/drawingml/2006/main">
               <a:ext uri="{FF2B5EF4-FFF2-40B4-BE49-F238E27FC236}">
-                <a16:creationId xmlns:a16="http://schemas.microsoft.com/office/drawing/2014/main" id="{4D869085-0EC7-45C2-9C47-5306DB766E35}"/>
+                <a16:creationId xmlns:a16="http://schemas.microsoft.com/office/drawing/2014/main" id="{685846BF-C6B0-4AE6-9EE8-FA825F1B9E4C}"/>
               </a:ext>
             </a:extLst>
           </p:cNvPr>
@@ -11256,7 +11264,7 @@
           <p:cNvPr id="7" name="">
             <a:extLst xmlns:a="http://schemas.openxmlformats.org/drawingml/2006/main">
               <a:ext uri="{FF2B5EF4-FFF2-40B4-BE49-F238E27FC236}">
-                <a16:creationId xmlns:a16="http://schemas.microsoft.com/office/drawing/2014/main" id="{F39FC323-872A-45A7-B1CA-F9E3AEAE1BC1}"/>
+                <a16:creationId xmlns:a16="http://schemas.microsoft.com/office/drawing/2014/main" id="{EAC81874-416D-487B-BC22-861BE3F397CC}"/>
               </a:ext>
             </a:extLst>
           </p:cNvPr>
@@ -11288,7 +11296,7 @@
           <p:cNvPr id="8" name="">
             <a:extLst xmlns:a="http://schemas.openxmlformats.org/drawingml/2006/main">
               <a:ext uri="{FF2B5EF4-FFF2-40B4-BE49-F238E27FC236}">
-                <a16:creationId xmlns:a16="http://schemas.microsoft.com/office/drawing/2014/main" id="{4B90A37D-D138-45AF-A030-C531B2C1244D}"/>
+                <a16:creationId xmlns:a16="http://schemas.microsoft.com/office/drawing/2014/main" id="{1EA9D9A2-5949-46E6-B01E-A48572989518}"/>
               </a:ext>
             </a:extLst>
           </p:cNvPr>
@@ -11345,7 +11353,7 @@
           <p:cNvPr id="9" name="">
             <a:extLst xmlns:a="http://schemas.openxmlformats.org/drawingml/2006/main">
               <a:ext uri="{FF2B5EF4-FFF2-40B4-BE49-F238E27FC236}">
-                <a16:creationId xmlns:a16="http://schemas.microsoft.com/office/drawing/2014/main" id="{55EDCE3D-1E59-4ADD-9858-A3710E15CCA0}"/>
+                <a16:creationId xmlns:a16="http://schemas.microsoft.com/office/drawing/2014/main" id="{2AB1E29F-170A-41EE-B50B-A0530B49602E}"/>
               </a:ext>
             </a:extLst>
           </p:cNvPr>
@@ -11406,7 +11414,7 @@
           <p:nvPr/>
         </p:nvPicPr>
         <p:blipFill>
-          <a:blip xmlns:r="http://schemas.openxmlformats.org/officeDocument/2006/relationships" xmlns:a="http://schemas.openxmlformats.org/drawingml/2006/main" r:embed="Rb2b3478efe7245f4"/>
+          <a:blip xmlns:r="http://schemas.openxmlformats.org/officeDocument/2006/relationships" xmlns:a="http://schemas.openxmlformats.org/drawingml/2006/main" r:embed="Rbcdd49a73ebd4d3f"/>
           <a:stretch xmlns:a="http://schemas.openxmlformats.org/drawingml/2006/main"/>
         </p:blipFill>
         <p:spPr>
@@ -11424,7 +11432,7 @@
           <p:cNvPr id="11" name="">
             <a:extLst xmlns:a="http://schemas.openxmlformats.org/drawingml/2006/main">
               <a:ext uri="{FF2B5EF4-FFF2-40B4-BE49-F238E27FC236}">
-                <a16:creationId xmlns:a16="http://schemas.microsoft.com/office/drawing/2014/main" id="{33E46482-B00C-433B-86BF-2799D7E21151}"/>
+                <a16:creationId xmlns:a16="http://schemas.microsoft.com/office/drawing/2014/main" id="{1DFC4CFE-2D17-4C0A-AB3B-1C8AB2F657AB}"/>
               </a:ext>
             </a:extLst>
           </p:cNvPr>
@@ -11481,7 +11489,7 @@
           <p:cNvPr id="12" name="">
             <a:extLst xmlns:a="http://schemas.openxmlformats.org/drawingml/2006/main">
               <a:ext uri="{FF2B5EF4-FFF2-40B4-BE49-F238E27FC236}">
-                <a16:creationId xmlns:a16="http://schemas.microsoft.com/office/drawing/2014/main" id="{0389CF69-90B0-4F59-9918-E914D7D8D96F}"/>
+                <a16:creationId xmlns:a16="http://schemas.microsoft.com/office/drawing/2014/main" id="{2B3C2DA6-5049-4942-B3CE-B3CBAA2DB4C0}"/>
               </a:ext>
             </a:extLst>
           </p:cNvPr>
@@ -11538,7 +11546,7 @@
           <p:cNvPr id="13" name="">
             <a:extLst xmlns:a="http://schemas.openxmlformats.org/drawingml/2006/main">
               <a:ext uri="{FF2B5EF4-FFF2-40B4-BE49-F238E27FC236}">
-                <a16:creationId xmlns:a16="http://schemas.microsoft.com/office/drawing/2014/main" id="{E466846C-4A6D-4C2B-AC13-7622D769108F}"/>
+                <a16:creationId xmlns:a16="http://schemas.microsoft.com/office/drawing/2014/main" id="{3964E92C-CA67-4DAC-BE29-0FE1014738B3}"/>
               </a:ext>
             </a:extLst>
           </p:cNvPr>
@@ -11570,7 +11578,7 @@
           <p:cNvPr id="14" name="">
             <a:extLst xmlns:a="http://schemas.openxmlformats.org/drawingml/2006/main">
               <a:ext uri="{FF2B5EF4-FFF2-40B4-BE49-F238E27FC236}">
-                <a16:creationId xmlns:a16="http://schemas.microsoft.com/office/drawing/2014/main" id="{2810289F-B0DB-440E-A26E-B02914F11D4B}"/>
+                <a16:creationId xmlns:a16="http://schemas.microsoft.com/office/drawing/2014/main" id="{ED1F2482-8A38-4FBF-96A0-471C52018F31}"/>
               </a:ext>
             </a:extLst>
           </p:cNvPr>
@@ -11627,7 +11635,7 @@
           <p:cNvPr id="15" name="">
             <a:extLst xmlns:a="http://schemas.openxmlformats.org/drawingml/2006/main">
               <a:ext uri="{FF2B5EF4-FFF2-40B4-BE49-F238E27FC236}">
-                <a16:creationId xmlns:a16="http://schemas.microsoft.com/office/drawing/2014/main" id="{AA5BCD22-9502-4A9F-8A63-F841ABC7F204}"/>
+                <a16:creationId xmlns:a16="http://schemas.microsoft.com/office/drawing/2014/main" id="{FA333C03-6619-4746-B479-A869701AA989}"/>
               </a:ext>
             </a:extLst>
           </p:cNvPr>
@@ -11682,7 +11690,7 @@
     </p:spTree>
     <p:extLst>
       <p:ext uri="{BB962C8B-B14F-4D97-AF65-F5344CB8AC3E}">
-        <p14:creationId xmlns:p14="http://schemas.microsoft.com/office/powerpoint/2010/main" val="1680285452"/>
+        <p14:creationId xmlns:p14="http://schemas.microsoft.com/office/powerpoint/2010/main" val="1142500155"/>
       </p:ext>
     </p:extLst>
   </p:cSld>
@@ -11837,7 +11845,7 @@
           <p:cNvPr id="23" name="">
             <a:extLst xmlns:a="http://schemas.openxmlformats.org/drawingml/2006/main">
               <a:ext uri="{FF2B5EF4-FFF2-40B4-BE49-F238E27FC236}">
-                <a16:creationId xmlns:a16="http://schemas.microsoft.com/office/drawing/2014/main" id="{CC7D864A-90D4-4EC4-96D2-C77469D26256}"/>
+                <a16:creationId xmlns:a16="http://schemas.microsoft.com/office/drawing/2014/main" id="{C7AAEC94-A6FD-46EC-9C24-31258B341246}"/>
               </a:ext>
             </a:extLst>
           </p:cNvPr>
@@ -11869,7 +11877,7 @@
           <p:cNvPr id="2" name="">
             <a:extLst xmlns:a="http://schemas.openxmlformats.org/drawingml/2006/main">
               <a:ext uri="{FF2B5EF4-FFF2-40B4-BE49-F238E27FC236}">
-                <a16:creationId xmlns:a16="http://schemas.microsoft.com/office/drawing/2014/main" id="{D7DF9459-C32F-4FC6-8BD1-D586DCDA9D25}"/>
+                <a16:creationId xmlns:a16="http://schemas.microsoft.com/office/drawing/2014/main" id="{9637CEA7-181C-4124-BF5C-B325AAE724CC}"/>
               </a:ext>
             </a:extLst>
           </p:cNvPr>
@@ -11926,7 +11934,7 @@
           <p:cNvPr id="3" name="">
             <a:extLst xmlns:a="http://schemas.openxmlformats.org/drawingml/2006/main">
               <a:ext uri="{FF2B5EF4-FFF2-40B4-BE49-F238E27FC236}">
-                <a16:creationId xmlns:a16="http://schemas.microsoft.com/office/drawing/2014/main" id="{985EBA0C-84BF-4729-8CCA-9876EBC8D589}"/>
+                <a16:creationId xmlns:a16="http://schemas.microsoft.com/office/drawing/2014/main" id="{CDB2C58D-07BB-4411-AE47-ED059B974467}"/>
               </a:ext>
             </a:extLst>
           </p:cNvPr>
@@ -11958,7 +11966,7 @@
           <p:cNvPr id="4" name="">
             <a:extLst xmlns:a="http://schemas.openxmlformats.org/drawingml/2006/main">
               <a:ext uri="{FF2B5EF4-FFF2-40B4-BE49-F238E27FC236}">
-                <a16:creationId xmlns:a16="http://schemas.microsoft.com/office/drawing/2014/main" id="{D9C03D96-6F6C-4DDD-9187-6DA2B5D02DBE}"/>
+                <a16:creationId xmlns:a16="http://schemas.microsoft.com/office/drawing/2014/main" id="{65DE08B0-9496-43AF-B727-5FB7C0473836}"/>
               </a:ext>
             </a:extLst>
           </p:cNvPr>
@@ -12015,7 +12023,7 @@
           <p:cNvPr id="5" name="">
             <a:extLst xmlns:a="http://schemas.openxmlformats.org/drawingml/2006/main">
               <a:ext uri="{FF2B5EF4-FFF2-40B4-BE49-F238E27FC236}">
-                <a16:creationId xmlns:a16="http://schemas.microsoft.com/office/drawing/2014/main" id="{6170A5C6-C9A5-4C5A-8951-D4335189E0ED}"/>
+                <a16:creationId xmlns:a16="http://schemas.microsoft.com/office/drawing/2014/main" id="{445A54E4-77A9-45DB-83C1-359AF806BFEB}"/>
               </a:ext>
             </a:extLst>
           </p:cNvPr>
@@ -12072,7 +12080,7 @@
           <p:cNvPr id="6" name="">
             <a:extLst xmlns:a="http://schemas.openxmlformats.org/drawingml/2006/main">
               <a:ext uri="{FF2B5EF4-FFF2-40B4-BE49-F238E27FC236}">
-                <a16:creationId xmlns:a16="http://schemas.microsoft.com/office/drawing/2014/main" id="{E72D6D37-AE01-4A2E-978E-64B487FA245F}"/>
+                <a16:creationId xmlns:a16="http://schemas.microsoft.com/office/drawing/2014/main" id="{C735CCDE-B48F-465A-B0C3-1D4D9DFF0309}"/>
               </a:ext>
             </a:extLst>
           </p:cNvPr>
@@ -12129,7 +12137,7 @@
           <p:cNvPr id="7" name="">
             <a:extLst xmlns:a="http://schemas.openxmlformats.org/drawingml/2006/main">
               <a:ext uri="{FF2B5EF4-FFF2-40B4-BE49-F238E27FC236}">
-                <a16:creationId xmlns:a16="http://schemas.microsoft.com/office/drawing/2014/main" id="{D00FC4E1-EFDF-45EB-AF2B-3BCAE9608BD3}"/>
+                <a16:creationId xmlns:a16="http://schemas.microsoft.com/office/drawing/2014/main" id="{806E43ED-6EF0-4127-BD73-B51AA5ED0840}"/>
               </a:ext>
             </a:extLst>
           </p:cNvPr>
@@ -12161,7 +12169,7 @@
           <p:cNvPr id="8" name="">
             <a:extLst xmlns:a="http://schemas.openxmlformats.org/drawingml/2006/main">
               <a:ext uri="{FF2B5EF4-FFF2-40B4-BE49-F238E27FC236}">
-                <a16:creationId xmlns:a16="http://schemas.microsoft.com/office/drawing/2014/main" id="{6ECA3D02-2105-4C77-B4A5-05FB87893418}"/>
+                <a16:creationId xmlns:a16="http://schemas.microsoft.com/office/drawing/2014/main" id="{F7F079E7-8BB6-434B-B269-DAF199D09BE9}"/>
               </a:ext>
             </a:extLst>
           </p:cNvPr>
@@ -12218,7 +12226,7 @@
           <p:cNvPr id="9" name="">
             <a:extLst xmlns:a="http://schemas.openxmlformats.org/drawingml/2006/main">
               <a:ext uri="{FF2B5EF4-FFF2-40B4-BE49-F238E27FC236}">
-                <a16:creationId xmlns:a16="http://schemas.microsoft.com/office/drawing/2014/main" id="{7A63C041-A0BF-464F-BC4D-D72D6162AA92}"/>
+                <a16:creationId xmlns:a16="http://schemas.microsoft.com/office/drawing/2014/main" id="{DCD3EBD2-A404-4B4E-9059-69CE38B1601A}"/>
               </a:ext>
             </a:extLst>
           </p:cNvPr>
@@ -12275,7 +12283,7 @@
           <p:cNvPr id="10" name="">
             <a:extLst xmlns:a="http://schemas.openxmlformats.org/drawingml/2006/main">
               <a:ext uri="{FF2B5EF4-FFF2-40B4-BE49-F238E27FC236}">
-                <a16:creationId xmlns:a16="http://schemas.microsoft.com/office/drawing/2014/main" id="{8E29BBF0-5230-41A5-9DE3-58B0486DF3D4}"/>
+                <a16:creationId xmlns:a16="http://schemas.microsoft.com/office/drawing/2014/main" id="{A63FF40F-4FF8-4B4A-A065-CF2A00ED5E1A}"/>
               </a:ext>
             </a:extLst>
           </p:cNvPr>
@@ -12309,7 +12317,7 @@
           <p:cNvPr id="11" name="">
             <a:extLst xmlns:a="http://schemas.openxmlformats.org/drawingml/2006/main">
               <a:ext uri="{FF2B5EF4-FFF2-40B4-BE49-F238E27FC236}">
-                <a16:creationId xmlns:a16="http://schemas.microsoft.com/office/drawing/2014/main" id="{74A2BA5C-ABCF-411A-A2E0-DA856D192484}"/>
+                <a16:creationId xmlns:a16="http://schemas.microsoft.com/office/drawing/2014/main" id="{796B9D76-966B-41F2-AC1F-B210809DB0B0}"/>
               </a:ext>
             </a:extLst>
           </p:cNvPr>
@@ -12341,7 +12349,7 @@
           <p:cNvPr id="12" name="">
             <a:extLst xmlns:a="http://schemas.openxmlformats.org/drawingml/2006/main">
               <a:ext uri="{FF2B5EF4-FFF2-40B4-BE49-F238E27FC236}">
-                <a16:creationId xmlns:a16="http://schemas.microsoft.com/office/drawing/2014/main" id="{71F9286C-73C3-4E86-A686-7B34E2B99408}"/>
+                <a16:creationId xmlns:a16="http://schemas.microsoft.com/office/drawing/2014/main" id="{49F6B89E-A2AD-4AAB-8D5B-EF2922A1FCD0}"/>
               </a:ext>
             </a:extLst>
           </p:cNvPr>
@@ -12398,7 +12406,7 @@
           <p:cNvPr id="13" name="">
             <a:extLst xmlns:a="http://schemas.openxmlformats.org/drawingml/2006/main">
               <a:ext uri="{FF2B5EF4-FFF2-40B4-BE49-F238E27FC236}">
-                <a16:creationId xmlns:a16="http://schemas.microsoft.com/office/drawing/2014/main" id="{50892D7C-29E8-4E00-8759-BB6E6AB13DDE}"/>
+                <a16:creationId xmlns:a16="http://schemas.microsoft.com/office/drawing/2014/main" id="{426FD5E1-9CD8-405A-83E3-82360C458FE9}"/>
               </a:ext>
             </a:extLst>
           </p:cNvPr>
@@ -12455,7 +12463,7 @@
           <p:cNvPr id="14" name="">
             <a:extLst xmlns:a="http://schemas.openxmlformats.org/drawingml/2006/main">
               <a:ext uri="{FF2B5EF4-FFF2-40B4-BE49-F238E27FC236}">
-                <a16:creationId xmlns:a16="http://schemas.microsoft.com/office/drawing/2014/main" id="{F47388AE-88CA-49EC-BBF2-228AE4C14E6E}"/>
+                <a16:creationId xmlns:a16="http://schemas.microsoft.com/office/drawing/2014/main" id="{51045BF1-AED7-45DB-A3C7-307CD713B2F6}"/>
               </a:ext>
             </a:extLst>
           </p:cNvPr>
@@ -12489,7 +12497,7 @@
           <p:cNvPr id="15" name="">
             <a:extLst xmlns:a="http://schemas.openxmlformats.org/drawingml/2006/main">
               <a:ext uri="{FF2B5EF4-FFF2-40B4-BE49-F238E27FC236}">
-                <a16:creationId xmlns:a16="http://schemas.microsoft.com/office/drawing/2014/main" id="{E192B8A7-BB70-4163-8A39-0355CB1DB0A9}"/>
+                <a16:creationId xmlns:a16="http://schemas.microsoft.com/office/drawing/2014/main" id="{3DA676A1-5728-47EB-B0A1-136432C3A44C}"/>
               </a:ext>
             </a:extLst>
           </p:cNvPr>
@@ -12521,7 +12529,7 @@
           <p:cNvPr id="16" name="">
             <a:extLst xmlns:a="http://schemas.openxmlformats.org/drawingml/2006/main">
               <a:ext uri="{FF2B5EF4-FFF2-40B4-BE49-F238E27FC236}">
-                <a16:creationId xmlns:a16="http://schemas.microsoft.com/office/drawing/2014/main" id="{50FBCB91-EEE4-4327-AD7A-3D843594F45A}"/>
+                <a16:creationId xmlns:a16="http://schemas.microsoft.com/office/drawing/2014/main" id="{9387ABE2-C25B-49C2-88FC-BFEE8094B944}"/>
               </a:ext>
             </a:extLst>
           </p:cNvPr>
@@ -12578,7 +12586,7 @@
           <p:cNvPr id="17" name="">
             <a:extLst xmlns:a="http://schemas.openxmlformats.org/drawingml/2006/main">
               <a:ext uri="{FF2B5EF4-FFF2-40B4-BE49-F238E27FC236}">
-                <a16:creationId xmlns:a16="http://schemas.microsoft.com/office/drawing/2014/main" id="{A38BED5A-27D0-41B1-B2C7-F6F9180BBD47}"/>
+                <a16:creationId xmlns:a16="http://schemas.microsoft.com/office/drawing/2014/main" id="{421671AB-5DCD-4672-8B0C-12D4B8E94EE9}"/>
               </a:ext>
             </a:extLst>
           </p:cNvPr>
@@ -12635,7 +12643,7 @@
           <p:cNvPr id="18" name="">
             <a:extLst xmlns:a="http://schemas.openxmlformats.org/drawingml/2006/main">
               <a:ext uri="{FF2B5EF4-FFF2-40B4-BE49-F238E27FC236}">
-                <a16:creationId xmlns:a16="http://schemas.microsoft.com/office/drawing/2014/main" id="{8960F98F-AB15-4B3D-BBC8-11006F2F4C1A}"/>
+                <a16:creationId xmlns:a16="http://schemas.microsoft.com/office/drawing/2014/main" id="{5B863CDE-61E8-434D-B910-2DF5937F9EE1}"/>
               </a:ext>
             </a:extLst>
           </p:cNvPr>
@@ -12669,7 +12677,7 @@
           <p:cNvPr id="19" name="">
             <a:extLst xmlns:a="http://schemas.openxmlformats.org/drawingml/2006/main">
               <a:ext uri="{FF2B5EF4-FFF2-40B4-BE49-F238E27FC236}">
-                <a16:creationId xmlns:a16="http://schemas.microsoft.com/office/drawing/2014/main" id="{651E0D4D-22F6-44BC-9FAB-5970306C1B17}"/>
+                <a16:creationId xmlns:a16="http://schemas.microsoft.com/office/drawing/2014/main" id="{DB2A3FB4-64C3-463B-9B37-67E21F661CA0}"/>
               </a:ext>
             </a:extLst>
           </p:cNvPr>
@@ -12701,7 +12709,7 @@
           <p:cNvPr id="20" name="">
             <a:extLst xmlns:a="http://schemas.openxmlformats.org/drawingml/2006/main">
               <a:ext uri="{FF2B5EF4-FFF2-40B4-BE49-F238E27FC236}">
-                <a16:creationId xmlns:a16="http://schemas.microsoft.com/office/drawing/2014/main" id="{249E43AE-D4BC-42F1-95A6-1FD9C3934193}"/>
+                <a16:creationId xmlns:a16="http://schemas.microsoft.com/office/drawing/2014/main" id="{668EEC61-5E89-412B-ACFA-2BE1053D7A1B}"/>
               </a:ext>
             </a:extLst>
           </p:cNvPr>
@@ -12758,7 +12766,7 @@
           <p:cNvPr id="21" name="">
             <a:extLst xmlns:a="http://schemas.openxmlformats.org/drawingml/2006/main">
               <a:ext uri="{FF2B5EF4-FFF2-40B4-BE49-F238E27FC236}">
-                <a16:creationId xmlns:a16="http://schemas.microsoft.com/office/drawing/2014/main" id="{C3535DCD-7FED-4C9D-9FA1-C517572DC8E2}"/>
+                <a16:creationId xmlns:a16="http://schemas.microsoft.com/office/drawing/2014/main" id="{9CD97A09-7298-4732-9288-FB931E3A3C08}"/>
               </a:ext>
             </a:extLst>
           </p:cNvPr>
@@ -12815,7 +12823,7 @@
           <p:cNvPr id="22" name="">
             <a:extLst xmlns:a="http://schemas.openxmlformats.org/drawingml/2006/main">
               <a:ext uri="{FF2B5EF4-FFF2-40B4-BE49-F238E27FC236}">
-                <a16:creationId xmlns:a16="http://schemas.microsoft.com/office/drawing/2014/main" id="{66822EFA-3BA0-4533-80C5-C3871F4D708B}"/>
+                <a16:creationId xmlns:a16="http://schemas.microsoft.com/office/drawing/2014/main" id="{5260031B-532F-4864-95C5-38757B1D9490}"/>
               </a:ext>
             </a:extLst>
           </p:cNvPr>
@@ -12870,7 +12878,7 @@
     </p:spTree>
     <p:extLst>
       <p:ext uri="{BB962C8B-B14F-4D97-AF65-F5344CB8AC3E}">
-        <p14:creationId xmlns:p14="http://schemas.microsoft.com/office/powerpoint/2010/main" val="399771496"/>
+        <p14:creationId xmlns:p14="http://schemas.microsoft.com/office/powerpoint/2010/main" val="1636532503"/>
       </p:ext>
     </p:extLst>
   </p:cSld>
@@ -13071,7 +13079,7 @@
           <p:cNvPr id="22" name="">
             <a:extLst xmlns:a="http://schemas.openxmlformats.org/drawingml/2006/main">
               <a:ext uri="{FF2B5EF4-FFF2-40B4-BE49-F238E27FC236}">
-                <a16:creationId xmlns:a16="http://schemas.microsoft.com/office/drawing/2014/main" id="{CFD5EBD9-E7F0-4E56-942A-0E5384C17718}"/>
+                <a16:creationId xmlns:a16="http://schemas.microsoft.com/office/drawing/2014/main" id="{93E489CB-1F63-4C47-9DB1-A07097E543EE}"/>
               </a:ext>
             </a:extLst>
           </p:cNvPr>
@@ -13103,7 +13111,7 @@
           <p:cNvPr id="2" name="">
             <a:extLst xmlns:a="http://schemas.openxmlformats.org/drawingml/2006/main">
               <a:ext uri="{FF2B5EF4-FFF2-40B4-BE49-F238E27FC236}">
-                <a16:creationId xmlns:a16="http://schemas.microsoft.com/office/drawing/2014/main" id="{CBC3D334-CE75-47EF-8BBF-A58958C8E16A}"/>
+                <a16:creationId xmlns:a16="http://schemas.microsoft.com/office/drawing/2014/main" id="{60857FD9-120F-45A3-807F-0515313901A4}"/>
               </a:ext>
             </a:extLst>
           </p:cNvPr>
@@ -13160,7 +13168,7 @@
           <p:cNvPr id="3" name="">
             <a:extLst xmlns:a="http://schemas.openxmlformats.org/drawingml/2006/main">
               <a:ext uri="{FF2B5EF4-FFF2-40B4-BE49-F238E27FC236}">
-                <a16:creationId xmlns:a16="http://schemas.microsoft.com/office/drawing/2014/main" id="{0D08D53F-1318-4758-BA87-62B7B76830A1}"/>
+                <a16:creationId xmlns:a16="http://schemas.microsoft.com/office/drawing/2014/main" id="{E077A979-8950-4D1E-97A1-3A40841BC455}"/>
               </a:ext>
             </a:extLst>
           </p:cNvPr>
@@ -13192,7 +13200,7 @@
           <p:cNvPr id="4" name="">
             <a:extLst xmlns:a="http://schemas.openxmlformats.org/drawingml/2006/main">
               <a:ext uri="{FF2B5EF4-FFF2-40B4-BE49-F238E27FC236}">
-                <a16:creationId xmlns:a16="http://schemas.microsoft.com/office/drawing/2014/main" id="{417269C0-BA61-4DA0-9C31-054D1E627096}"/>
+                <a16:creationId xmlns:a16="http://schemas.microsoft.com/office/drawing/2014/main" id="{7742769D-5D2C-46D3-80E1-005F2896C2FC}"/>
               </a:ext>
             </a:extLst>
           </p:cNvPr>
@@ -13249,7 +13257,7 @@
           <p:cNvPr id="5" name="">
             <a:extLst xmlns:a="http://schemas.openxmlformats.org/drawingml/2006/main">
               <a:ext uri="{FF2B5EF4-FFF2-40B4-BE49-F238E27FC236}">
-                <a16:creationId xmlns:a16="http://schemas.microsoft.com/office/drawing/2014/main" id="{B12DDAB0-4F96-4898-936A-37E53ED8CDDD}"/>
+                <a16:creationId xmlns:a16="http://schemas.microsoft.com/office/drawing/2014/main" id="{D1750CDF-D470-42D3-9C53-1F8996234692}"/>
               </a:ext>
             </a:extLst>
           </p:cNvPr>
@@ -13306,7 +13314,7 @@
           <p:cNvPr id="6" name="">
             <a:extLst xmlns:a="http://schemas.openxmlformats.org/drawingml/2006/main">
               <a:ext uri="{FF2B5EF4-FFF2-40B4-BE49-F238E27FC236}">
-                <a16:creationId xmlns:a16="http://schemas.microsoft.com/office/drawing/2014/main" id="{EC246F8C-CC7E-4222-A933-52698563063A}"/>
+                <a16:creationId xmlns:a16="http://schemas.microsoft.com/office/drawing/2014/main" id="{34BA7480-A7A6-4AFE-9B92-FAA8E6E26742}"/>
               </a:ext>
             </a:extLst>
           </p:cNvPr>
@@ -13363,7 +13371,7 @@
           <p:cNvPr id="7" name="">
             <a:extLst xmlns:a="http://schemas.openxmlformats.org/drawingml/2006/main">
               <a:ext uri="{FF2B5EF4-FFF2-40B4-BE49-F238E27FC236}">
-                <a16:creationId xmlns:a16="http://schemas.microsoft.com/office/drawing/2014/main" id="{87AC5B2F-CE76-4CC9-A6AD-244245D8C36E}"/>
+                <a16:creationId xmlns:a16="http://schemas.microsoft.com/office/drawing/2014/main" id="{00076877-1411-407C-847B-C606AA07BF7B}"/>
               </a:ext>
             </a:extLst>
           </p:cNvPr>
@@ -13395,7 +13403,7 @@
           <p:cNvPr id="8" name="">
             <a:extLst xmlns:a="http://schemas.openxmlformats.org/drawingml/2006/main">
               <a:ext uri="{FF2B5EF4-FFF2-40B4-BE49-F238E27FC236}">
-                <a16:creationId xmlns:a16="http://schemas.microsoft.com/office/drawing/2014/main" id="{D485C63B-CA68-4E7D-AC6D-92F6D7B57D6F}"/>
+                <a16:creationId xmlns:a16="http://schemas.microsoft.com/office/drawing/2014/main" id="{1CD1ACD6-5B9A-4FE5-8170-5D3C8A4A0F56}"/>
               </a:ext>
             </a:extLst>
           </p:cNvPr>
@@ -13452,7 +13460,7 @@
           <p:cNvPr id="9" name="">
             <a:extLst xmlns:a="http://schemas.openxmlformats.org/drawingml/2006/main">
               <a:ext uri="{FF2B5EF4-FFF2-40B4-BE49-F238E27FC236}">
-                <a16:creationId xmlns:a16="http://schemas.microsoft.com/office/drawing/2014/main" id="{2E97D9BC-475E-4DB5-A317-A9CF1903C9C8}"/>
+                <a16:creationId xmlns:a16="http://schemas.microsoft.com/office/drawing/2014/main" id="{521F6404-F964-4754-A4B5-FBCB4C07A3B2}"/>
               </a:ext>
             </a:extLst>
           </p:cNvPr>
@@ -13509,7 +13517,7 @@
           <p:cNvPr id="10" name="">
             <a:extLst xmlns:a="http://schemas.openxmlformats.org/drawingml/2006/main">
               <a:ext uri="{FF2B5EF4-FFF2-40B4-BE49-F238E27FC236}">
-                <a16:creationId xmlns:a16="http://schemas.microsoft.com/office/drawing/2014/main" id="{EA1F564E-2521-48EB-80B6-8397FBAD917E}"/>
+                <a16:creationId xmlns:a16="http://schemas.microsoft.com/office/drawing/2014/main" id="{714944A4-A0BE-4ECA-928C-C70C27B8CE79}"/>
               </a:ext>
             </a:extLst>
           </p:cNvPr>
@@ -13543,7 +13551,7 @@
           <p:cNvPr id="11" name="">
             <a:extLst xmlns:a="http://schemas.openxmlformats.org/drawingml/2006/main">
               <a:ext uri="{FF2B5EF4-FFF2-40B4-BE49-F238E27FC236}">
-                <a16:creationId xmlns:a16="http://schemas.microsoft.com/office/drawing/2014/main" id="{27413589-7333-4D4E-9D16-615DF309888E}"/>
+                <a16:creationId xmlns:a16="http://schemas.microsoft.com/office/drawing/2014/main" id="{3A65F982-942D-495B-AAC6-F35645EE0299}"/>
               </a:ext>
             </a:extLst>
           </p:cNvPr>
@@ -13575,7 +13583,7 @@
           <p:cNvPr id="12" name="">
             <a:extLst xmlns:a="http://schemas.openxmlformats.org/drawingml/2006/main">
               <a:ext uri="{FF2B5EF4-FFF2-40B4-BE49-F238E27FC236}">
-                <a16:creationId xmlns:a16="http://schemas.microsoft.com/office/drawing/2014/main" id="{D1B0DD05-BF9D-4737-A924-05A8C4EF9CC0}"/>
+                <a16:creationId xmlns:a16="http://schemas.microsoft.com/office/drawing/2014/main" id="{3C679966-CD81-4E37-936E-BDC6C6C68458}"/>
               </a:ext>
             </a:extLst>
           </p:cNvPr>
@@ -13632,7 +13640,7 @@
           <p:cNvPr id="13" name="">
             <a:extLst xmlns:a="http://schemas.openxmlformats.org/drawingml/2006/main">
               <a:ext uri="{FF2B5EF4-FFF2-40B4-BE49-F238E27FC236}">
-                <a16:creationId xmlns:a16="http://schemas.microsoft.com/office/drawing/2014/main" id="{F91AC568-5CC7-42D1-8EF7-94F2E32B94A6}"/>
+                <a16:creationId xmlns:a16="http://schemas.microsoft.com/office/drawing/2014/main" id="{6AAB4FEE-F136-422C-B21B-31D652395771}"/>
               </a:ext>
             </a:extLst>
           </p:cNvPr>
@@ -13689,7 +13697,7 @@
           <p:cNvPr id="14" name="">
             <a:extLst xmlns:a="http://schemas.openxmlformats.org/drawingml/2006/main">
               <a:ext uri="{FF2B5EF4-FFF2-40B4-BE49-F238E27FC236}">
-                <a16:creationId xmlns:a16="http://schemas.microsoft.com/office/drawing/2014/main" id="{67389CCA-C73E-4002-8E5C-E7FA953670B7}"/>
+                <a16:creationId xmlns:a16="http://schemas.microsoft.com/office/drawing/2014/main" id="{DEAA0EBF-882E-4661-B2F2-677845903F46}"/>
               </a:ext>
             </a:extLst>
           </p:cNvPr>
@@ -13723,7 +13731,7 @@
           <p:cNvPr id="15" name="">
             <a:extLst xmlns:a="http://schemas.openxmlformats.org/drawingml/2006/main">
               <a:ext uri="{FF2B5EF4-FFF2-40B4-BE49-F238E27FC236}">
-                <a16:creationId xmlns:a16="http://schemas.microsoft.com/office/drawing/2014/main" id="{2B34D978-443B-41A2-B0C8-315D98EEE904}"/>
+                <a16:creationId xmlns:a16="http://schemas.microsoft.com/office/drawing/2014/main" id="{F49BABEE-F275-416F-8856-288CA26A9880}"/>
               </a:ext>
             </a:extLst>
           </p:cNvPr>
@@ -13755,7 +13763,7 @@
           <p:cNvPr id="16" name="">
             <a:extLst xmlns:a="http://schemas.openxmlformats.org/drawingml/2006/main">
               <a:ext uri="{FF2B5EF4-FFF2-40B4-BE49-F238E27FC236}">
-                <a16:creationId xmlns:a16="http://schemas.microsoft.com/office/drawing/2014/main" id="{BF35004C-B07E-4938-AAB7-BF11281CAA40}"/>
+                <a16:creationId xmlns:a16="http://schemas.microsoft.com/office/drawing/2014/main" id="{F372C73F-F452-47CF-96F2-C35761F8B6E9}"/>
               </a:ext>
             </a:extLst>
           </p:cNvPr>
@@ -13812,7 +13820,7 @@
           <p:cNvPr id="17" name="">
             <a:extLst xmlns:a="http://schemas.openxmlformats.org/drawingml/2006/main">
               <a:ext uri="{FF2B5EF4-FFF2-40B4-BE49-F238E27FC236}">
-                <a16:creationId xmlns:a16="http://schemas.microsoft.com/office/drawing/2014/main" id="{62280589-0756-4750-9D90-DCB21324A08C}"/>
+                <a16:creationId xmlns:a16="http://schemas.microsoft.com/office/drawing/2014/main" id="{E368C03D-5D19-442B-BEB7-2CB3982F6016}"/>
               </a:ext>
             </a:extLst>
           </p:cNvPr>
@@ -13869,7 +13877,7 @@
           <p:cNvPr id="18" name="">
             <a:extLst xmlns:a="http://schemas.openxmlformats.org/drawingml/2006/main">
               <a:ext uri="{FF2B5EF4-FFF2-40B4-BE49-F238E27FC236}">
-                <a16:creationId xmlns:a16="http://schemas.microsoft.com/office/drawing/2014/main" id="{FCD8C3A0-462C-4143-92EF-306473F87DF4}"/>
+                <a16:creationId xmlns:a16="http://schemas.microsoft.com/office/drawing/2014/main" id="{9D6E4BC4-727C-4D9A-BF98-F85CA87065A8}"/>
               </a:ext>
             </a:extLst>
           </p:cNvPr>
@@ -13903,7 +13911,7 @@
           <p:cNvPr id="19" name="">
             <a:extLst xmlns:a="http://schemas.openxmlformats.org/drawingml/2006/main">
               <a:ext uri="{FF2B5EF4-FFF2-40B4-BE49-F238E27FC236}">
-                <a16:creationId xmlns:a16="http://schemas.microsoft.com/office/drawing/2014/main" id="{DF62428C-4DF9-488E-8ECA-75B1F6452B66}"/>
+                <a16:creationId xmlns:a16="http://schemas.microsoft.com/office/drawing/2014/main" id="{97460911-3B76-4E04-934B-EB9F040EED16}"/>
               </a:ext>
             </a:extLst>
           </p:cNvPr>
@@ -13935,7 +13943,7 @@
           <p:cNvPr id="20" name="">
             <a:extLst xmlns:a="http://schemas.openxmlformats.org/drawingml/2006/main">
               <a:ext uri="{FF2B5EF4-FFF2-40B4-BE49-F238E27FC236}">
-                <a16:creationId xmlns:a16="http://schemas.microsoft.com/office/drawing/2014/main" id="{12D2E71B-C483-4296-B815-F546555260B7}"/>
+                <a16:creationId xmlns:a16="http://schemas.microsoft.com/office/drawing/2014/main" id="{8069F441-7755-4A6A-8D4E-32DC4C19F8A3}"/>
               </a:ext>
             </a:extLst>
           </p:cNvPr>
@@ -13992,7 +14000,7 @@
           <p:cNvPr id="21" name="">
             <a:extLst xmlns:a="http://schemas.openxmlformats.org/drawingml/2006/main">
               <a:ext uri="{FF2B5EF4-FFF2-40B4-BE49-F238E27FC236}">
-                <a16:creationId xmlns:a16="http://schemas.microsoft.com/office/drawing/2014/main" id="{2D796DD0-0EC0-4ECE-AA3E-8D750AEE423D}"/>
+                <a16:creationId xmlns:a16="http://schemas.microsoft.com/office/drawing/2014/main" id="{CB3E352A-3BDD-4790-BC20-5C37CE7A7F6C}"/>
               </a:ext>
             </a:extLst>
           </p:cNvPr>
@@ -14047,7 +14055,7 @@
     </p:spTree>
     <p:extLst>
       <p:ext uri="{BB962C8B-B14F-4D97-AF65-F5344CB8AC3E}">
-        <p14:creationId xmlns:p14="http://schemas.microsoft.com/office/powerpoint/2010/main" val="1344083015"/>
+        <p14:creationId xmlns:p14="http://schemas.microsoft.com/office/powerpoint/2010/main" val="124714565"/>
       </p:ext>
     </p:extLst>
   </p:cSld>
